--- a/takt2-gamedev.pptx
+++ b/takt2-gamedev.pptx
@@ -3623,7 +3623,7 @@
                 <a:latin typeface="Onest"/>
               </a:rPr>
               <a:t>Разработка:
-выбор игроком игры</a:t>
+почерк студии и уровень проработки</a:t>
             </a:r>
           </a:p>
         </p:txBody>
@@ -3804,7 +3804,7 @@
                 </a:solidFill>
                 <a:latin typeface="Onest"/>
               </a:rPr>
-              <a:t>Кто делает саму игру</a:t>
+              <a:t>Что даёт разработчик</a:t>
             </a:r>
           </a:p>
         </p:txBody>
@@ -3843,7 +3843,7 @@
                 </a:solidFill>
                 <a:latin typeface="Onest"/>
               </a:rPr>
-              <a:t>CD Projekt RED, Rockstar North, Riot, Valve, Insomniac. Самый населённый этаж — тысячи студий.</a:t>
+              <a:t>На выходе — игра с узнаваемым почерком студии: как сделаны детали, насколько плотно проработан мир, чувствуется ли рука автора.</a:t>
             </a:r>
           </a:p>
         </p:txBody>
@@ -3996,8 +3996,7 @@
                 </a:solidFill>
                 <a:latin typeface="Onest"/>
               </a:rPr>
-              <a:t>Какую играть —
-не где покупать</a:t>
+              <a:t>Один замысел — разная реализация</a:t>
             </a:r>
           </a:p>
         </p:txBody>
@@ -4036,7 +4035,7 @@
                 </a:solidFill>
                 <a:latin typeface="Onest"/>
               </a:rPr>
-              <a:t>Разработчик конкурирует за выбор игры игроком. Витрина — за то, где он её купит. Два разных объекта.</a:t>
+              <a:t>Два одинаковых по жанру проекта расходятся уровнем проработки. Watch Dogs и GTA качественно разные, но ни одна не «уникальнее» другой.</a:t>
             </a:r>
           </a:p>
         </p:txBody>
@@ -4164,7 +4163,7 @@
         <p:spPr>
           <a:xfrm>
             <a:off x="8307628" y="3621024"/>
-            <a:ext cx="3033674" cy="365759"/>
+            <a:ext cx="3033674" cy="676656"/>
           </a:xfrm>
           <a:prstGeom prst="rect">
             <a:avLst/>
@@ -4189,7 +4188,7 @@
                 </a:solidFill>
                 <a:latin typeface="Onest"/>
               </a:rPr>
-              <a:t>Заменяем</a:t>
+              <a:t>Самый населённый этаж</a:t>
             </a:r>
           </a:p>
         </p:txBody>
@@ -4202,8 +4201,8 @@
         </p:nvSpPr>
         <p:spPr>
           <a:xfrm>
-            <a:off x="8307628" y="4059936"/>
-            <a:ext cx="3033674" cy="1645920"/>
+            <a:off x="8307628" y="4370832"/>
+            <a:ext cx="3033674" cy="1344167"/>
           </a:xfrm>
           <a:prstGeom prst="rect">
             <a:avLst/>
@@ -4228,7 +4227,7 @@
                 </a:solidFill>
                 <a:latin typeface="Onest"/>
               </a:rPr>
-              <a:t>Студий много, профили пересекаются. Игра переживает смену разработчика — Risk of Rain пережила.</a:t>
+              <a:t>Тысячи студий, профили пересекаются. Игра переживает смену разработчика — значит, уровень заменяем и горлышком не является.</a:t>
             </a:r>
           </a:p>
         </p:txBody>
@@ -4316,7 +4315,7 @@
         <p:spPr>
           <a:xfrm>
             <a:off x="594360" y="457200"/>
-            <a:ext cx="3506724" cy="292608"/>
+            <a:ext cx="2244852" cy="292608"/>
           </a:xfrm>
           <a:prstGeom prst="roundRect">
             <a:avLst>
@@ -4362,7 +4361,7 @@
         <p:spPr>
           <a:xfrm>
             <a:off x="594360" y="457200"/>
-            <a:ext cx="3506724" cy="292608"/>
+            <a:ext cx="2244852" cy="292608"/>
           </a:xfrm>
           <a:prstGeom prst="rect">
             <a:avLst/>
@@ -4387,7 +4386,7 @@
                 </a:solidFill>
                 <a:latin typeface="Onest"/>
               </a:rPr>
-              <a:t>ЭТАЖ 06 · ИЗДАНИЕ И МАРКЕТИНГ</a:t>
+              <a:t>ЭТАЖ 06 · ИЗДАНИЕ</a:t>
             </a:r>
           </a:p>
         </p:txBody>
@@ -4466,7 +4465,7 @@
                 <a:latin typeface="Onest"/>
               </a:rPr>
               <a:t>Издание:
-права на издание и релиз</a:t>
+права на релиз и продвижение</a:t>
             </a:r>
           </a:p>
         </p:txBody>
@@ -4686,7 +4685,7 @@
                 </a:solidFill>
                 <a:latin typeface="Onest"/>
               </a:rPr>
-              <a:t>Издатель ≠ разработчик</a:t>
+              <a:t>Права на издание и релиз</a:t>
             </a:r>
           </a:p>
         </p:txBody>
@@ -4725,7 +4724,7 @@
                 </a:solidFill>
                 <a:latin typeface="Onest"/>
               </a:rPr>
-              <a:t>«Человека-паука» 2018 года сделала Insomniac — тогда независимая студия. Sony была издателем и купила её через год за $229 млн.</a:t>
+              <a:t>Берёт игру и выводит её на рынок: финансирование, договоры с платформами, сроки. Пример: «Человека-паука» 2018 года сделала Insomniac — тогда независимая студия, Sony была только издателем и купила её через год за $229 млн.</a:t>
             </a:r>
           </a:p>
         </p:txBody>
@@ -4810,7 +4809,7 @@
                 </a:solidFill>
                 <a:latin typeface="Onest"/>
               </a:rPr>
-              <a:t>ХОЛДИНГ</a:t>
+              <a:t>МАРКЕТИНГ</a:t>
             </a:r>
           </a:p>
         </p:txBody>
@@ -4861,7 +4860,7 @@
       </p:sp>
       <p:pic>
         <p:nvPicPr>
-          <p:cNvPr id="17" name="Picture 16" descr="ui_layers_F26A1B.png"/>
+          <p:cNvPr id="17" name="Picture 16" descr="ui_eye_F26A1B.png"/>
           <p:cNvPicPr>
             <a:picLocks noChangeAspect="1"/>
           </p:cNvPicPr>
@@ -4917,8 +4916,7 @@
                 </a:solidFill>
                 <a:latin typeface="Onest"/>
               </a:rPr>
-              <a:t>Холдинг — доли
-в тех, кто делает</a:t>
+              <a:t>Отдельный слой внутри издания</a:t>
             </a:r>
           </a:p>
         </p:txBody>
@@ -4957,7 +4955,7 @@
                 </a:solidFill>
                 <a:latin typeface="Onest"/>
               </a:rPr>
-              <a:t>Tencent взяла 93% Riot в 2011-м и весь остаток к 2015-му. Игр не делает сама.</a:t>
+              <a:t>Трейлеры, пресса, инфлюенсеры, вишлисты до релиза. Отвечает за него издатель, поэтому этаж один — но объект конкуренции здесь свой: внимание до покупки.</a:t>
             </a:r>
           </a:p>
         </p:txBody>
@@ -5042,7 +5040,7 @@
                 </a:solidFill>
                 <a:latin typeface="Onest"/>
               </a:rPr>
-              <a:t>ОШИБКА СТАРОЙ КАРТЫ</a:t>
+              <a:t>ХОЛДИНГ</a:t>
             </a:r>
           </a:p>
         </p:txBody>
@@ -5093,7 +5091,7 @@
       </p:sp>
       <p:pic>
         <p:nvPicPr>
-          <p:cNvPr id="23" name="Picture 22" descr="ui_compare_F26A1B.png"/>
+          <p:cNvPr id="23" name="Picture 22" descr="ui_layers_F26A1B.png"/>
           <p:cNvPicPr>
             <a:picLocks noChangeAspect="1"/>
           </p:cNvPicPr>
@@ -5149,8 +5147,7 @@
                 </a:solidFill>
                 <a:latin typeface="Onest"/>
               </a:rPr>
-              <a:t>Три роли,
-три объекта</a:t>
+              <a:t>Доли в тех, кто делает</a:t>
             </a:r>
           </a:p>
         </p:txBody>
@@ -5189,7 +5186,7 @@
                 </a:solidFill>
                 <a:latin typeface="Onest"/>
               </a:rPr>
-              <a:t>На старой карте Tencent и Sony стояли на «разработке». Разработчик, издатель и холдинг конкурируют за разное.</a:t>
+              <a:t>Tencent взяла 93% Riot в 2011-м и весь остаток к 2015-му. Игр не делает сама — конкурирует за активы, а не за релиз.</a:t>
             </a:r>
           </a:p>
         </p:txBody>
@@ -5277,7 +5274,7 @@
         <p:spPr>
           <a:xfrm>
             <a:off x="594360" y="457200"/>
-            <a:ext cx="3401568" cy="292608"/>
+            <a:ext cx="3296412" cy="292608"/>
           </a:xfrm>
           <a:prstGeom prst="roundRect">
             <a:avLst>
@@ -5323,7 +5320,7 @@
         <p:spPr>
           <a:xfrm>
             <a:off x="594360" y="457200"/>
-            <a:ext cx="3401568" cy="292608"/>
+            <a:ext cx="3296412" cy="292608"/>
           </a:xfrm>
           <a:prstGeom prst="rect">
             <a:avLst/>
@@ -5348,7 +5345,7 @@
                 </a:solidFill>
                 <a:latin typeface="Onest"/>
               </a:rPr>
-              <a:t>ЭТАЖ 07 · ПЛАТФОРМЫ И ЖЕЛЕЗО</a:t>
+              <a:t>ЭТАЖ 07 · ИГРОВЫЕ ПЛАТФОРМЫ</a:t>
             </a:r>
           </a:p>
         </p:txBody>
@@ -5426,7 +5423,7 @@
                 </a:solidFill>
                 <a:latin typeface="Onest"/>
               </a:rPr>
-              <a:t>Платформы и железо:
+              <a:t>Игровые платформы:
 установленная база и эксклюзивы</a:t>
             </a:r>
           </a:p>
@@ -5623,7 +5620,7 @@
                 </a:solidFill>
                 <a:latin typeface="Onest"/>
               </a:rPr>
-              <a:t>Закрытые экосистемы со своими правилами и сертификацией. Конкурируют за игроков с устройством и за эксклюзивы.</a:t>
+              <a:t>PlayStation, Xbox, Switch. Закрытые экосистемы: своё железо, своя сертификация, свои эксклюзивы. Конкурируют за проданные приставки.</a:t>
             </a:r>
           </a:p>
         </p:txBody>
@@ -5795,7 +5792,7 @@
                 </a:solidFill>
                 <a:latin typeface="Onest"/>
               </a:rPr>
-              <a:t>Самая большая аудитория — и свои ворота у каждой системы.</a:t>
+              <a:t>iOS и Android. Самая большая установленная база — и своя пара ворот у каждой системы.</a:t>
             </a:r>
           </a:p>
         </p:txBody>
@@ -5923,7 +5920,7 @@
         <p:spPr>
           <a:xfrm>
             <a:off x="8307628" y="3621024"/>
-            <a:ext cx="3033674" cy="365759"/>
+            <a:ext cx="3033674" cy="676656"/>
           </a:xfrm>
           <a:prstGeom prst="rect">
             <a:avLst/>
@@ -5948,7 +5945,7 @@
                 </a:solidFill>
                 <a:latin typeface="Onest"/>
               </a:rPr>
-              <a:t>PC — открытая</a:t>
+              <a:t>PC — открытая платформа</a:t>
             </a:r>
           </a:p>
         </p:txBody>
@@ -5961,8 +5958,8 @@
         </p:nvSpPr>
         <p:spPr>
           <a:xfrm>
-            <a:off x="8307628" y="4059936"/>
-            <a:ext cx="3033674" cy="1645920"/>
+            <a:off x="8307628" y="4370832"/>
+            <a:ext cx="3033674" cy="1344167"/>
           </a:xfrm>
           <a:prstGeom prst="rect">
             <a:avLst/>
@@ -5987,7 +5984,7 @@
                 </a:solidFill>
                 <a:latin typeface="Onest"/>
               </a:rPr>
-              <a:t>Windows, Mac, Linux. Вышел на Windows и не вышел на Mac — потерял пару процентов. Платформы — данность: под них делают.</a:t>
+              <a:t>Windows, macOS, Linux. Никто не сертифицирует игру и не владеет входом: собрал билд — запустил. Отсюда и разница с витриной, которая вход контролирует.</a:t>
             </a:r>
           </a:p>
         </p:txBody>
@@ -6035,7 +6032,7 @@
                 </a:solidFill>
                 <a:latin typeface="Onest"/>
               </a:rPr>
-              <a:t>провал запуска случился на PS4 и Xbox One — платформа определила судьбу релиза и снятие с PS Store.</a:t>
+              <a:t>провал запуска случился на PS4 и Xbox One — старое железо платформы определило судьбу релиза.</a:t>
             </a:r>
           </a:p>
         </p:txBody>
@@ -6225,7 +6222,7 @@
                 <a:latin typeface="Onest"/>
               </a:rPr>
               <a:t>Витрины и дистрибуция:
-аккаунт и библиотека игрока</a:t>
+время игрока и его LTV</a:t>
             </a:r>
           </a:p>
         </p:txBody>
@@ -6326,7 +6323,7 @@
       </p:pic>
       <p:pic>
         <p:nvPicPr>
-          <p:cNvPr id="9" name="Picture 8" descr="xbox.png"/>
+          <p:cNvPr id="9" name="Picture 8" descr="appstore.png"/>
           <p:cNvPicPr>
             <a:picLocks noChangeAspect="1"/>
           </p:cNvPicPr>
@@ -6348,9 +6345,177 @@
           </a:prstGeom>
         </p:spPr>
       </p:pic>
+      <p:sp>
+        <p:nvSpPr>
+          <p:cNvPr id="10" name="TextBox 9"/>
+          <p:cNvSpPr txBox="1"/>
+          <p:nvPr/>
+        </p:nvSpPr>
+        <p:spPr>
+          <a:xfrm>
+            <a:off x="850392" y="3557015"/>
+            <a:ext cx="3033674" cy="365759"/>
+          </a:xfrm>
+          <a:prstGeom prst="rect">
+            <a:avLst/>
+          </a:prstGeom>
+          <a:noFill/>
+        </p:spPr>
+        <p:txBody>
+          <a:bodyPr wrap="square" lIns="0" rIns="0" tIns="0" bIns="0" anchor="t">
+            <a:spAutoFit/>
+          </a:bodyPr>
+          <a:lstStyle/>
+          <a:p>
+            <a:pPr algn="l">
+              <a:lnSpc>
+                <a:spcPct val="108000"/>
+              </a:lnSpc>
+            </a:pPr>
+            <a:r>
+              <a:rPr sz="1700" b="1">
+                <a:solidFill>
+                  <a:srgbClr val="16140F"/>
+                </a:solidFill>
+                <a:latin typeface="Onest"/>
+              </a:rPr>
+              <a:t>Что такое витрина</a:t>
+            </a:r>
+          </a:p>
+        </p:txBody>
+      </p:sp>
+      <p:sp>
+        <p:nvSpPr>
+          <p:cNvPr id="11" name="TextBox 10"/>
+          <p:cNvSpPr txBox="1"/>
+          <p:nvPr/>
+        </p:nvSpPr>
+        <p:spPr>
+          <a:xfrm>
+            <a:off x="850392" y="3995927"/>
+            <a:ext cx="3033674" cy="1645920"/>
+          </a:xfrm>
+          <a:prstGeom prst="rect">
+            <a:avLst/>
+          </a:prstGeom>
+          <a:noFill/>
+        </p:spPr>
+        <p:txBody>
+          <a:bodyPr wrap="square" lIns="0" rIns="0" tIns="0" bIns="0" anchor="t">
+            <a:spAutoFit/>
+          </a:bodyPr>
+          <a:lstStyle/>
+          <a:p>
+            <a:pPr algn="l">
+              <a:lnSpc>
+                <a:spcPct val="130000"/>
+              </a:lnSpc>
+            </a:pPr>
+            <a:r>
+              <a:rPr sz="1300" b="0">
+                <a:solidFill>
+                  <a:srgbClr val="6B6558"/>
+                </a:solidFill>
+                <a:latin typeface="Onest"/>
+              </a:rPr>
+              <a:t>Магазин, который владеет аккаунтом игрока, его библиотекой, платежами и рекомендациями. Steam, PlayStation Store, Xbox, eShop, App Store, Google Play.</a:t>
+            </a:r>
+          </a:p>
+        </p:txBody>
+      </p:sp>
+      <p:sp>
+        <p:nvSpPr>
+          <p:cNvPr id="12" name="Rounded Rectangle 11"/>
+          <p:cNvSpPr/>
+          <p:nvPr/>
+        </p:nvSpPr>
+        <p:spPr>
+          <a:xfrm>
+            <a:off x="4322978" y="2148840"/>
+            <a:ext cx="3545738" cy="3749039"/>
+          </a:xfrm>
+          <a:prstGeom prst="roundRect">
+            <a:avLst>
+              <a:gd name="adj" fmla="val 4126"/>
+            </a:avLst>
+          </a:prstGeom>
+          <a:solidFill>
+            <a:srgbClr val="DCE2D9"/>
+          </a:solidFill>
+          <a:ln>
+            <a:noFill/>
+          </a:ln>
+          <a:effectLst/>
+        </p:spPr>
+        <p:style>
+          <a:lnRef idx="1">
+            <a:schemeClr val="accent1"/>
+          </a:lnRef>
+          <a:fillRef idx="3">
+            <a:schemeClr val="accent1"/>
+          </a:fillRef>
+          <a:effectRef idx="2">
+            <a:schemeClr val="accent1"/>
+          </a:effectRef>
+          <a:fontRef idx="minor">
+            <a:schemeClr val="lt1"/>
+          </a:fontRef>
+        </p:style>
+        <p:txBody>
+          <a:bodyPr rtlCol="0" anchor="ctr"/>
+          <a:lstStyle/>
+          <a:p>
+            <a:pPr algn="ctr"/>
+          </a:p>
+        </p:txBody>
+      </p:sp>
+      <p:sp>
+        <p:nvSpPr>
+          <p:cNvPr id="13" name="Oval 12"/>
+          <p:cNvSpPr/>
+          <p:nvPr/>
+        </p:nvSpPr>
+        <p:spPr>
+          <a:xfrm>
+            <a:off x="4579010" y="2404872"/>
+            <a:ext cx="1051560" cy="1051560"/>
+          </a:xfrm>
+          <a:prstGeom prst="ellipse">
+            <a:avLst/>
+          </a:prstGeom>
+          <a:solidFill>
+            <a:srgbClr val="E7E1D5"/>
+          </a:solidFill>
+          <a:ln>
+            <a:noFill/>
+          </a:ln>
+          <a:effectLst/>
+        </p:spPr>
+        <p:style>
+          <a:lnRef idx="1">
+            <a:schemeClr val="accent1"/>
+          </a:lnRef>
+          <a:fillRef idx="3">
+            <a:schemeClr val="accent1"/>
+          </a:fillRef>
+          <a:effectRef idx="2">
+            <a:schemeClr val="accent1"/>
+          </a:effectRef>
+          <a:fontRef idx="minor">
+            <a:schemeClr val="lt1"/>
+          </a:fontRef>
+        </p:style>
+        <p:txBody>
+          <a:bodyPr rtlCol="0" anchor="ctr"/>
+          <a:lstStyle/>
+          <a:p>
+            <a:pPr algn="ctr"/>
+          </a:p>
+        </p:txBody>
+      </p:sp>
       <p:pic>
         <p:nvPicPr>
-          <p:cNvPr id="10" name="Picture 9" descr="appstore.png"/>
+          <p:cNvPr id="14" name="Picture 13" descr="ui_clock_F26A1B.png"/>
           <p:cNvPicPr>
             <a:picLocks noChangeAspect="1"/>
           </p:cNvPicPr>
@@ -6364,17 +6529,185 @@
         </p:blipFill>
         <p:spPr>
           <a:xfrm>
-            <a:off x="3044952" y="2404872"/>
-            <a:ext cx="566928" cy="566928"/>
+            <a:off x="4816754" y="2642615"/>
+            <a:ext cx="576071" cy="576071"/>
           </a:xfrm>
           <a:prstGeom prst="rect">
             <a:avLst/>
           </a:prstGeom>
         </p:spPr>
       </p:pic>
+      <p:sp>
+        <p:nvSpPr>
+          <p:cNvPr id="15" name="TextBox 14"/>
+          <p:cNvSpPr txBox="1"/>
+          <p:nvPr/>
+        </p:nvSpPr>
+        <p:spPr>
+          <a:xfrm>
+            <a:off x="4579010" y="3621024"/>
+            <a:ext cx="3033674" cy="676656"/>
+          </a:xfrm>
+          <a:prstGeom prst="rect">
+            <a:avLst/>
+          </a:prstGeom>
+          <a:noFill/>
+        </p:spPr>
+        <p:txBody>
+          <a:bodyPr wrap="square" lIns="0" rIns="0" tIns="0" bIns="0" anchor="t">
+            <a:spAutoFit/>
+          </a:bodyPr>
+          <a:lstStyle/>
+          <a:p>
+            <a:pPr algn="l">
+              <a:lnSpc>
+                <a:spcPct val="108000"/>
+              </a:lnSpc>
+            </a:pPr>
+            <a:r>
+              <a:rPr sz="1700" b="1">
+                <a:solidFill>
+                  <a:srgbClr val="16140F"/>
+                </a:solidFill>
+                <a:latin typeface="Onest"/>
+              </a:rPr>
+              <a:t>За что конкурируют витрины</a:t>
+            </a:r>
+          </a:p>
+        </p:txBody>
+      </p:sp>
+      <p:sp>
+        <p:nvSpPr>
+          <p:cNvPr id="16" name="TextBox 15"/>
+          <p:cNvSpPr txBox="1"/>
+          <p:nvPr/>
+        </p:nvSpPr>
+        <p:spPr>
+          <a:xfrm>
+            <a:off x="4579010" y="4370832"/>
+            <a:ext cx="3033674" cy="1344167"/>
+          </a:xfrm>
+          <a:prstGeom prst="rect">
+            <a:avLst/>
+          </a:prstGeom>
+          <a:noFill/>
+        </p:spPr>
+        <p:txBody>
+          <a:bodyPr wrap="square" lIns="0" rIns="0" tIns="0" bIns="0" anchor="t">
+            <a:spAutoFit/>
+          </a:bodyPr>
+          <a:lstStyle/>
+          <a:p>
+            <a:pPr algn="l">
+              <a:lnSpc>
+                <a:spcPct val="130000"/>
+              </a:lnSpc>
+            </a:pPr>
+            <a:r>
+              <a:rPr sz="1300" b="0">
+                <a:solidFill>
+                  <a:srgbClr val="6B6558"/>
+                </a:solidFill>
+                <a:latin typeface="Onest"/>
+              </a:rPr>
+              <a:t>За время игрока и его пожизненную ценность: чем дольше он живёт на витрине, тем больше покупок и комиссии. Плюс за каталог разработчиков — комиссией 30% против 12%.</a:t>
+            </a:r>
+          </a:p>
+        </p:txBody>
+      </p:sp>
+      <p:sp>
+        <p:nvSpPr>
+          <p:cNvPr id="17" name="Rounded Rectangle 16"/>
+          <p:cNvSpPr/>
+          <p:nvPr/>
+        </p:nvSpPr>
+        <p:spPr>
+          <a:xfrm>
+            <a:off x="8051596" y="2148840"/>
+            <a:ext cx="3545738" cy="3749039"/>
+          </a:xfrm>
+          <a:prstGeom prst="roundRect">
+            <a:avLst>
+              <a:gd name="adj" fmla="val 4126"/>
+            </a:avLst>
+          </a:prstGeom>
+          <a:solidFill>
+            <a:srgbClr val="F26A1B"/>
+          </a:solidFill>
+          <a:ln>
+            <a:noFill/>
+          </a:ln>
+          <a:effectLst/>
+        </p:spPr>
+        <p:style>
+          <a:lnRef idx="1">
+            <a:schemeClr val="accent1"/>
+          </a:lnRef>
+          <a:fillRef idx="3">
+            <a:schemeClr val="accent1"/>
+          </a:fillRef>
+          <a:effectRef idx="2">
+            <a:schemeClr val="accent1"/>
+          </a:effectRef>
+          <a:fontRef idx="minor">
+            <a:schemeClr val="lt1"/>
+          </a:fontRef>
+        </p:style>
+        <p:txBody>
+          <a:bodyPr rtlCol="0" anchor="ctr"/>
+          <a:lstStyle/>
+          <a:p>
+            <a:pPr algn="ctr"/>
+          </a:p>
+        </p:txBody>
+      </p:sp>
+      <p:sp>
+        <p:nvSpPr>
+          <p:cNvPr id="18" name="Oval 17"/>
+          <p:cNvSpPr/>
+          <p:nvPr/>
+        </p:nvSpPr>
+        <p:spPr>
+          <a:xfrm>
+            <a:off x="8307628" y="2404872"/>
+            <a:ext cx="1051560" cy="1051560"/>
+          </a:xfrm>
+          <a:prstGeom prst="ellipse">
+            <a:avLst/>
+          </a:prstGeom>
+          <a:solidFill>
+            <a:srgbClr val="D9560F"/>
+          </a:solidFill>
+          <a:ln>
+            <a:noFill/>
+          </a:ln>
+          <a:effectLst/>
+        </p:spPr>
+        <p:style>
+          <a:lnRef idx="1">
+            <a:schemeClr val="accent1"/>
+          </a:lnRef>
+          <a:fillRef idx="3">
+            <a:schemeClr val="accent1"/>
+          </a:fillRef>
+          <a:effectRef idx="2">
+            <a:schemeClr val="accent1"/>
+          </a:effectRef>
+          <a:fontRef idx="minor">
+            <a:schemeClr val="lt1"/>
+          </a:fontRef>
+        </p:style>
+        <p:txBody>
+          <a:bodyPr rtlCol="0" anchor="ctr"/>
+          <a:lstStyle/>
+          <a:p>
+            <a:pPr algn="ctr"/>
+          </a:p>
+        </p:txBody>
+      </p:sp>
       <p:pic>
         <p:nvPicPr>
-          <p:cNvPr id="11" name="Picture 10" descr="googleplay.png"/>
+          <p:cNvPr id="19" name="Picture 18" descr="ui_gate_F26A1B.png"/>
           <p:cNvPicPr>
             <a:picLocks noChangeAspect="1"/>
           </p:cNvPicPr>
@@ -6388,390 +6721,6 @@
         </p:blipFill>
         <p:spPr>
           <a:xfrm>
-            <a:off x="3776472" y="2404872"/>
-            <a:ext cx="566928" cy="566928"/>
-          </a:xfrm>
-          <a:prstGeom prst="rect">
-            <a:avLst/>
-          </a:prstGeom>
-        </p:spPr>
-      </p:pic>
-      <p:sp>
-        <p:nvSpPr>
-          <p:cNvPr id="12" name="TextBox 11"/>
-          <p:cNvSpPr txBox="1"/>
-          <p:nvPr/>
-        </p:nvSpPr>
-        <p:spPr>
-          <a:xfrm>
-            <a:off x="850392" y="3557015"/>
-            <a:ext cx="3033674" cy="365759"/>
-          </a:xfrm>
-          <a:prstGeom prst="rect">
-            <a:avLst/>
-          </a:prstGeom>
-          <a:noFill/>
-        </p:spPr>
-        <p:txBody>
-          <a:bodyPr wrap="square" lIns="0" rIns="0" tIns="0" bIns="0" anchor="t">
-            <a:spAutoFit/>
-          </a:bodyPr>
-          <a:lstStyle/>
-          <a:p>
-            <a:pPr algn="l">
-              <a:lnSpc>
-                <a:spcPct val="108000"/>
-              </a:lnSpc>
-            </a:pPr>
-            <a:r>
-              <a:rPr sz="1700" b="1">
-                <a:solidFill>
-                  <a:srgbClr val="16140F"/>
-                </a:solidFill>
-                <a:latin typeface="Onest"/>
-              </a:rPr>
-              <a:t>Что такое витрина</a:t>
-            </a:r>
-          </a:p>
-        </p:txBody>
-      </p:sp>
-      <p:sp>
-        <p:nvSpPr>
-          <p:cNvPr id="13" name="TextBox 12"/>
-          <p:cNvSpPr txBox="1"/>
-          <p:nvPr/>
-        </p:nvSpPr>
-        <p:spPr>
-          <a:xfrm>
-            <a:off x="850392" y="3995927"/>
-            <a:ext cx="3033674" cy="1645920"/>
-          </a:xfrm>
-          <a:prstGeom prst="rect">
-            <a:avLst/>
-          </a:prstGeom>
-          <a:noFill/>
-        </p:spPr>
-        <p:txBody>
-          <a:bodyPr wrap="square" lIns="0" rIns="0" tIns="0" bIns="0" anchor="t">
-            <a:spAutoFit/>
-          </a:bodyPr>
-          <a:lstStyle/>
-          <a:p>
-            <a:pPr algn="l">
-              <a:lnSpc>
-                <a:spcPct val="130000"/>
-              </a:lnSpc>
-            </a:pPr>
-            <a:r>
-              <a:rPr sz="1300" b="0">
-                <a:solidFill>
-                  <a:srgbClr val="6B6558"/>
-                </a:solidFill>
-                <a:latin typeface="Onest"/>
-              </a:rPr>
-              <a:t>Платформа, которая владеет аккаунтом игрока: библиотекой, платежами, рекомендациями. Steam, PlayStation Store, Xbox, eShop, App Store, Google Play.</a:t>
-            </a:r>
-          </a:p>
-        </p:txBody>
-      </p:sp>
-      <p:sp>
-        <p:nvSpPr>
-          <p:cNvPr id="14" name="Rounded Rectangle 13"/>
-          <p:cNvSpPr/>
-          <p:nvPr/>
-        </p:nvSpPr>
-        <p:spPr>
-          <a:xfrm>
-            <a:off x="4322978" y="2148840"/>
-            <a:ext cx="3545738" cy="3749039"/>
-          </a:xfrm>
-          <a:prstGeom prst="roundRect">
-            <a:avLst>
-              <a:gd name="adj" fmla="val 4126"/>
-            </a:avLst>
-          </a:prstGeom>
-          <a:solidFill>
-            <a:srgbClr val="DCE2D9"/>
-          </a:solidFill>
-          <a:ln>
-            <a:noFill/>
-          </a:ln>
-          <a:effectLst/>
-        </p:spPr>
-        <p:style>
-          <a:lnRef idx="1">
-            <a:schemeClr val="accent1"/>
-          </a:lnRef>
-          <a:fillRef idx="3">
-            <a:schemeClr val="accent1"/>
-          </a:fillRef>
-          <a:effectRef idx="2">
-            <a:schemeClr val="accent1"/>
-          </a:effectRef>
-          <a:fontRef idx="minor">
-            <a:schemeClr val="lt1"/>
-          </a:fontRef>
-        </p:style>
-        <p:txBody>
-          <a:bodyPr rtlCol="0" anchor="ctr"/>
-          <a:lstStyle/>
-          <a:p>
-            <a:pPr algn="ctr"/>
-          </a:p>
-        </p:txBody>
-      </p:sp>
-      <p:sp>
-        <p:nvSpPr>
-          <p:cNvPr id="15" name="Oval 14"/>
-          <p:cNvSpPr/>
-          <p:nvPr/>
-        </p:nvSpPr>
-        <p:spPr>
-          <a:xfrm>
-            <a:off x="4579010" y="2404872"/>
-            <a:ext cx="1051560" cy="1051560"/>
-          </a:xfrm>
-          <a:prstGeom prst="ellipse">
-            <a:avLst/>
-          </a:prstGeom>
-          <a:solidFill>
-            <a:srgbClr val="E7E1D5"/>
-          </a:solidFill>
-          <a:ln>
-            <a:noFill/>
-          </a:ln>
-          <a:effectLst/>
-        </p:spPr>
-        <p:style>
-          <a:lnRef idx="1">
-            <a:schemeClr val="accent1"/>
-          </a:lnRef>
-          <a:fillRef idx="3">
-            <a:schemeClr val="accent1"/>
-          </a:fillRef>
-          <a:effectRef idx="2">
-            <a:schemeClr val="accent1"/>
-          </a:effectRef>
-          <a:fontRef idx="minor">
-            <a:schemeClr val="lt1"/>
-          </a:fontRef>
-        </p:style>
-        <p:txBody>
-          <a:bodyPr rtlCol="0" anchor="ctr"/>
-          <a:lstStyle/>
-          <a:p>
-            <a:pPr algn="ctr"/>
-          </a:p>
-        </p:txBody>
-      </p:sp>
-      <p:pic>
-        <p:nvPicPr>
-          <p:cNvPr id="16" name="Picture 15" descr="ui_key_F26A1B.png"/>
-          <p:cNvPicPr>
-            <a:picLocks noChangeAspect="1"/>
-          </p:cNvPicPr>
-          <p:nvPr/>
-        </p:nvPicPr>
-        <p:blipFill>
-          <a:blip r:embed="rId7"/>
-          <a:stretch>
-            <a:fillRect/>
-          </a:stretch>
-        </p:blipFill>
-        <p:spPr>
-          <a:xfrm>
-            <a:off x="4816754" y="2642615"/>
-            <a:ext cx="576071" cy="576071"/>
-          </a:xfrm>
-          <a:prstGeom prst="rect">
-            <a:avLst/>
-          </a:prstGeom>
-        </p:spPr>
-      </p:pic>
-      <p:sp>
-        <p:nvSpPr>
-          <p:cNvPr id="17" name="TextBox 16"/>
-          <p:cNvSpPr txBox="1"/>
-          <p:nvPr/>
-        </p:nvSpPr>
-        <p:spPr>
-          <a:xfrm>
-            <a:off x="4579010" y="3621024"/>
-            <a:ext cx="3033674" cy="676656"/>
-          </a:xfrm>
-          <a:prstGeom prst="rect">
-            <a:avLst/>
-          </a:prstGeom>
-          <a:noFill/>
-        </p:spPr>
-        <p:txBody>
-          <a:bodyPr wrap="square" lIns="0" rIns="0" tIns="0" bIns="0" anchor="t">
-            <a:spAutoFit/>
-          </a:bodyPr>
-          <a:lstStyle/>
-          <a:p>
-            <a:pPr algn="l">
-              <a:lnSpc>
-                <a:spcPct val="108000"/>
-              </a:lnSpc>
-            </a:pPr>
-            <a:r>
-              <a:rPr sz="1700" b="1">
-                <a:solidFill>
-                  <a:srgbClr val="16140F"/>
-                </a:solidFill>
-                <a:latin typeface="Onest"/>
-              </a:rPr>
-              <a:t>За что конкурируют витрины</a:t>
-            </a:r>
-          </a:p>
-        </p:txBody>
-      </p:sp>
-      <p:sp>
-        <p:nvSpPr>
-          <p:cNvPr id="18" name="TextBox 17"/>
-          <p:cNvSpPr txBox="1"/>
-          <p:nvPr/>
-        </p:nvSpPr>
-        <p:spPr>
-          <a:xfrm>
-            <a:off x="4579010" y="4370832"/>
-            <a:ext cx="3033674" cy="1344167"/>
-          </a:xfrm>
-          <a:prstGeom prst="rect">
-            <a:avLst/>
-          </a:prstGeom>
-          <a:noFill/>
-        </p:spPr>
-        <p:txBody>
-          <a:bodyPr wrap="square" lIns="0" rIns="0" tIns="0" bIns="0" anchor="t">
-            <a:spAutoFit/>
-          </a:bodyPr>
-          <a:lstStyle/>
-          <a:p>
-            <a:pPr algn="l">
-              <a:lnSpc>
-                <a:spcPct val="130000"/>
-              </a:lnSpc>
-            </a:pPr>
-            <a:r>
-              <a:rPr sz="1300" b="0">
-                <a:solidFill>
-                  <a:srgbClr val="6B6558"/>
-                </a:solidFill>
-                <a:latin typeface="Onest"/>
-              </a:rPr>
-              <a:t>За аккаунт с библиотекой — он создаёт издержки переключения. За эксклюзивы: CS, Dota, Half-Life только в Steam. За каталог разработчиков — комиссией 30% против 12%.</a:t>
-            </a:r>
-          </a:p>
-        </p:txBody>
-      </p:sp>
-      <p:sp>
-        <p:nvSpPr>
-          <p:cNvPr id="19" name="Rounded Rectangle 18"/>
-          <p:cNvSpPr/>
-          <p:nvPr/>
-        </p:nvSpPr>
-        <p:spPr>
-          <a:xfrm>
-            <a:off x="8051596" y="2148840"/>
-            <a:ext cx="3545738" cy="3749039"/>
-          </a:xfrm>
-          <a:prstGeom prst="roundRect">
-            <a:avLst>
-              <a:gd name="adj" fmla="val 4126"/>
-            </a:avLst>
-          </a:prstGeom>
-          <a:solidFill>
-            <a:srgbClr val="F26A1B"/>
-          </a:solidFill>
-          <a:ln>
-            <a:noFill/>
-          </a:ln>
-          <a:effectLst/>
-        </p:spPr>
-        <p:style>
-          <a:lnRef idx="1">
-            <a:schemeClr val="accent1"/>
-          </a:lnRef>
-          <a:fillRef idx="3">
-            <a:schemeClr val="accent1"/>
-          </a:fillRef>
-          <a:effectRef idx="2">
-            <a:schemeClr val="accent1"/>
-          </a:effectRef>
-          <a:fontRef idx="minor">
-            <a:schemeClr val="lt1"/>
-          </a:fontRef>
-        </p:style>
-        <p:txBody>
-          <a:bodyPr rtlCol="0" anchor="ctr"/>
-          <a:lstStyle/>
-          <a:p>
-            <a:pPr algn="ctr"/>
-          </a:p>
-        </p:txBody>
-      </p:sp>
-      <p:sp>
-        <p:nvSpPr>
-          <p:cNvPr id="20" name="Oval 19"/>
-          <p:cNvSpPr/>
-          <p:nvPr/>
-        </p:nvSpPr>
-        <p:spPr>
-          <a:xfrm>
-            <a:off x="8307628" y="2404872"/>
-            <a:ext cx="1051560" cy="1051560"/>
-          </a:xfrm>
-          <a:prstGeom prst="ellipse">
-            <a:avLst/>
-          </a:prstGeom>
-          <a:solidFill>
-            <a:srgbClr val="D9560F"/>
-          </a:solidFill>
-          <a:ln>
-            <a:noFill/>
-          </a:ln>
-          <a:effectLst/>
-        </p:spPr>
-        <p:style>
-          <a:lnRef idx="1">
-            <a:schemeClr val="accent1"/>
-          </a:lnRef>
-          <a:fillRef idx="3">
-            <a:schemeClr val="accent1"/>
-          </a:fillRef>
-          <a:effectRef idx="2">
-            <a:schemeClr val="accent1"/>
-          </a:effectRef>
-          <a:fontRef idx="minor">
-            <a:schemeClr val="lt1"/>
-          </a:fontRef>
-        </p:style>
-        <p:txBody>
-          <a:bodyPr rtlCol="0" anchor="ctr"/>
-          <a:lstStyle/>
-          <a:p>
-            <a:pPr algn="ctr"/>
-          </a:p>
-        </p:txBody>
-      </p:sp>
-      <p:pic>
-        <p:nvPicPr>
-          <p:cNvPr id="21" name="Picture 20" descr="ui_gate_F26A1B.png"/>
-          <p:cNvPicPr>
-            <a:picLocks noChangeAspect="1"/>
-          </p:cNvPicPr>
-          <p:nvPr/>
-        </p:nvPicPr>
-        <p:blipFill>
-          <a:blip r:embed="rId8"/>
-          <a:stretch>
-            <a:fillRect/>
-          </a:stretch>
-        </p:blipFill>
-        <p:spPr>
-          <a:xfrm>
             <a:off x="8545372" y="2642615"/>
             <a:ext cx="576071" cy="576071"/>
           </a:xfrm>
@@ -6782,14 +6731,92 @@
       </p:pic>
       <p:sp>
         <p:nvSpPr>
+          <p:cNvPr id="20" name="TextBox 19"/>
+          <p:cNvSpPr txBox="1"/>
+          <p:nvPr/>
+        </p:nvSpPr>
+        <p:spPr>
+          <a:xfrm>
+            <a:off x="8307628" y="3621024"/>
+            <a:ext cx="3033674" cy="676656"/>
+          </a:xfrm>
+          <a:prstGeom prst="rect">
+            <a:avLst/>
+          </a:prstGeom>
+          <a:noFill/>
+        </p:spPr>
+        <p:txBody>
+          <a:bodyPr wrap="square" lIns="0" rIns="0" tIns="0" bIns="0" anchor="t">
+            <a:spAutoFit/>
+          </a:bodyPr>
+          <a:lstStyle/>
+          <a:p>
+            <a:pPr algn="l">
+              <a:lnSpc>
+                <a:spcPct val="108000"/>
+              </a:lnSpc>
+            </a:pPr>
+            <a:r>
+              <a:rPr sz="1700" b="1">
+                <a:solidFill>
+                  <a:srgbClr val="16140F"/>
+                </a:solidFill>
+                <a:latin typeface="Onest"/>
+              </a:rPr>
+              <a:t>Горлышко — на этом этаже</a:t>
+            </a:r>
+          </a:p>
+        </p:txBody>
+      </p:sp>
+      <p:sp>
+        <p:nvSpPr>
+          <p:cNvPr id="21" name="TextBox 20"/>
+          <p:cNvSpPr txBox="1"/>
+          <p:nvPr/>
+        </p:nvSpPr>
+        <p:spPr>
+          <a:xfrm>
+            <a:off x="8307628" y="4370832"/>
+            <a:ext cx="3033674" cy="1344167"/>
+          </a:xfrm>
+          <a:prstGeom prst="rect">
+            <a:avLst/>
+          </a:prstGeom>
+          <a:noFill/>
+        </p:spPr>
+        <p:txBody>
+          <a:bodyPr wrap="square" lIns="0" rIns="0" tIns="0" bIns="0" anchor="t">
+            <a:spAutoFit/>
+          </a:bodyPr>
+          <a:lstStyle/>
+          <a:p>
+            <a:pPr algn="l">
+              <a:lnSpc>
+                <a:spcPct val="130000"/>
+              </a:lnSpc>
+            </a:pPr>
+            <a:r>
+              <a:rPr sz="1300" b="0">
+                <a:solidFill>
+                  <a:srgbClr val="3E2A1C"/>
+                </a:solidFill>
+                <a:latin typeface="Onest"/>
+              </a:rPr>
+              <a:t>Готовая игра не доходит до игрока иначе как через витрину. Почему именно здесь — разберём во втором разделе.</a:t>
+            </a:r>
+          </a:p>
+        </p:txBody>
+      </p:sp>
+      <p:sp>
+        <p:nvSpPr>
           <p:cNvPr id="22" name="TextBox 21"/>
           <p:cNvSpPr txBox="1"/>
           <p:nvPr/>
         </p:nvSpPr>
         <p:spPr>
           <a:xfrm>
-            <a:off x="8307628" y="3621024"/>
-            <a:ext cx="3033674" cy="365759"/>
+            <a:off x="594360" y="6035040"/>
+            <a:ext cx="11002975" cy="548640"/>
           </a:xfrm>
           <a:prstGeom prst="rect">
             <a:avLst/>
@@ -6804,104 +6831,17 @@
           <a:p>
             <a:pPr algn="l">
               <a:lnSpc>
-                <a:spcPct val="108000"/>
-              </a:lnSpc>
-            </a:pPr>
-            <a:r>
-              <a:rPr sz="1700" b="1">
-                <a:solidFill>
-                  <a:srgbClr val="16140F"/>
-                </a:solidFill>
-                <a:latin typeface="Onest"/>
-              </a:rPr>
-              <a:t>Почему горлышко</a:t>
-            </a:r>
-          </a:p>
-        </p:txBody>
-      </p:sp>
-      <p:sp>
-        <p:nvSpPr>
-          <p:cNvPr id="23" name="TextBox 22"/>
-          <p:cNvSpPr txBox="1"/>
-          <p:nvPr/>
-        </p:nvSpPr>
-        <p:spPr>
-          <a:xfrm>
-            <a:off x="8307628" y="4059936"/>
-            <a:ext cx="3033674" cy="1645920"/>
-          </a:xfrm>
-          <a:prstGeom prst="rect">
-            <a:avLst/>
-          </a:prstGeom>
-          <a:noFill/>
-        </p:spPr>
-        <p:txBody>
-          <a:bodyPr wrap="square" lIns="0" rIns="0" tIns="0" bIns="0" anchor="t">
-            <a:spAutoFit/>
-          </a:bodyPr>
-          <a:lstStyle/>
-          <a:p>
-            <a:pPr algn="l">
-              <a:lnSpc>
                 <a:spcPct val="130000"/>
               </a:lnSpc>
             </a:pPr>
             <a:r>
-              <a:rPr sz="1300" b="0">
-                <a:solidFill>
-                  <a:srgbClr val="3E2A1C"/>
-                </a:solidFill>
-                <a:latin typeface="Onest"/>
-              </a:rPr>
-              <a:t>Готовая игра не доходит до игрока иначе как через одну из немногих таких платформ, и каждая контролирует свою экосистему. Внимание и привычка — следствие, а не объект.</a:t>
-            </a:r>
-          </a:p>
-        </p:txBody>
-      </p:sp>
-      <p:sp>
-        <p:nvSpPr>
-          <p:cNvPr id="24" name="TextBox 23"/>
-          <p:cNvSpPr txBox="1"/>
-          <p:nvPr/>
-        </p:nvSpPr>
-        <p:spPr>
-          <a:xfrm>
-            <a:off x="594360" y="6035040"/>
-            <a:ext cx="11002975" cy="457200"/>
-          </a:xfrm>
-          <a:prstGeom prst="rect">
-            <a:avLst/>
-          </a:prstGeom>
-          <a:noFill/>
-        </p:spPr>
-        <p:txBody>
-          <a:bodyPr wrap="square" lIns="0" rIns="0" tIns="0" bIns="0" anchor="t">
-            <a:spAutoFit/>
-          </a:bodyPr>
-          <a:lstStyle/>
-          <a:p>
-            <a:pPr algn="l">
-              <a:lnSpc>
-                <a:spcPct val="125000"/>
-              </a:lnSpc>
-            </a:pPr>
-            <a:r>
-              <a:rPr sz="1200" b="1">
-                <a:solidFill>
-                  <a:srgbClr val="B34405"/>
-                </a:solidFill>
-                <a:latin typeface="Onest"/>
-              </a:rPr>
-              <a:t>На примере Cyberpunk 2077: </a:t>
-            </a:r>
-            <a:r>
               <a:rPr sz="1200" b="0">
                 <a:solidFill>
                   <a:srgbClr val="6B6558"/>
                 </a:solidFill>
                 <a:latin typeface="Onest"/>
               </a:rPr>
-              <a:t>снята с PlayStation Store 18.12.2020 с полным возвратом денег, вернулась 21.06.2021.</a:t>
+              <a:t>Платформа — это где игра запускается: железо, ОС, API. Витрина — это где её покупают: аккаунт, библиотека, платёж. Xbox — и то и другое сразу, отсюда путаница. Но PC как платформа открыт, а витрина на нём всё равно контролирует вход.</a:t>
             </a:r>
           </a:p>
         </p:txBody>
@@ -7678,8 +7618,8 @@
                 </a:solidFill>
                 <a:latin typeface="Onest"/>
               </a:rPr>
-              <a:t>Друзья, достижения,
-отзывы</a:t>
+              <a:t>Друзья
+и достижения</a:t>
             </a:r>
           </a:p>
         </p:txBody>
@@ -8053,7 +7993,7 @@
                 </a:solidFill>
                 <a:latin typeface="Onest"/>
               </a:rPr>
-              <a:t>деньги дальше по цепочке</a:t>
+              <a:t>то, за что и конкурируют</a:t>
             </a:r>
           </a:p>
         </p:txBody>
@@ -8066,8 +8006,8 @@
         </p:nvSpPr>
         <p:spPr>
           <a:xfrm>
-            <a:off x="594360" y="4892040"/>
-            <a:ext cx="11002975" cy="1097280"/>
+            <a:off x="594360" y="5029200"/>
+            <a:ext cx="11002975" cy="411480"/>
           </a:xfrm>
           <a:prstGeom prst="rect">
             <a:avLst/>
@@ -8082,56 +8022,17 @@
           <a:p>
             <a:pPr algn="l">
               <a:lnSpc>
-                <a:spcPct val="135000"/>
-              </a:lnSpc>
-            </a:pPr>
-            <a:r>
-              <a:rPr sz="1300" b="0">
+                <a:spcPct val="130000"/>
+              </a:lnSpc>
+            </a:pPr>
+            <a:r>
+              <a:rPr sz="1200" b="0">
                 <a:solidFill>
                   <a:srgbClr val="6B6558"/>
                 </a:solidFill>
                 <a:latin typeface="Onest"/>
               </a:rPr>
-              <a:t>Отзывы в Steam — артефакт доверия, которого нет у Epic в таком виде: чем больше игроков, тем качественнее отзывы, тем выше готовность покупать и рисковать. Достижения не переносятся, друзья для онлайна — только через платформу. Всё это и есть удержание.</a:t>
-            </a:r>
-          </a:p>
-        </p:txBody>
-      </p:sp>
-      <p:sp>
-        <p:nvSpPr>
-          <p:cNvPr id="30" name="TextBox 29"/>
-          <p:cNvSpPr txBox="1"/>
-          <p:nvPr/>
-        </p:nvSpPr>
-        <p:spPr>
-          <a:xfrm>
-            <a:off x="594360" y="6172200"/>
-            <a:ext cx="11002975" cy="411480"/>
-          </a:xfrm>
-          <a:prstGeom prst="rect">
-            <a:avLst/>
-          </a:prstGeom>
-          <a:noFill/>
-        </p:spPr>
-        <p:txBody>
-          <a:bodyPr wrap="square" lIns="0" rIns="0" tIns="0" bIns="0" anchor="t">
-            <a:spAutoFit/>
-          </a:bodyPr>
-          <a:lstStyle/>
-          <a:p>
-            <a:pPr algn="l">
-              <a:lnSpc>
-                <a:spcPct val="130000"/>
-              </a:lnSpc>
-            </a:pPr>
-            <a:r>
-              <a:rPr sz="1200" b="0">
-                <a:solidFill>
-                  <a:srgbClr val="6B6558"/>
-                </a:solidFill>
-                <a:latin typeface="Onest"/>
-              </a:rPr>
-              <a:t>Правило: время — ресурс, который конвертируется в удержание. Объектом мы называем то, что накапливается и удерживается, — библиотеку и аккаунт.</a:t>
+              <a:t>Библиотеку нельзя перенести, достижения не переносятся, друзья для онлайна — только через платформу. Каждый год на витрине повышает цену ухода.</a:t>
             </a:r>
           </a:p>
         </p:txBody>
@@ -8484,7 +8385,7 @@
                 </a:solidFill>
                 <a:latin typeface="Onest"/>
               </a:rPr>
-              <a:t>техтребования каждой платформы; блокер</a:t>
+              <a:t>Технические требования каждой платформы. Не прошёл — релиза нет.</a:t>
             </a:r>
           </a:p>
         </p:txBody>
@@ -8647,9 +8548,7 @@
                 </a:solidFill>
                 <a:latin typeface="Onest"/>
               </a:rPr>
-              <a:t>Steam 30% · Epic 12%
-App Store, Google Play 30% (15% малому бизнесу)
-консоли ≈30%, условия под NDA</a:t>
+              <a:t>Steam 30%. Epic 12%. App Store и Google Play 30%, по 15% для малых разработчиков. Консоли около 30%, точные условия под NDA.</a:t>
             </a:r>
           </a:p>
         </p:txBody>
@@ -8812,7 +8711,7 @@
                 </a:solidFill>
                 <a:latin typeface="Onest"/>
               </a:rPr>
-              <a:t>под каждую платформу; порт — отдельный бюджет</a:t>
+              <a:t>Своя сборка под каждую платформу. Порт — отдельный бюджет и сроки.</a:t>
             </a:r>
           </a:p>
         </p:txBody>
@@ -8975,7 +8874,7 @@
                 </a:solidFill>
                 <a:latin typeface="Onest"/>
               </a:rPr>
-              <a:t>ESRB, PEGI, USK; без него — не на консоль</a:t>
+              <a:t>ESRB в США, PEGI в Европе, USK в Германии — независимые организации, которые присваивают игре возрастную категорию. Без рейтинга консольные витрины игру не берут.</a:t>
             </a:r>
           </a:p>
         </p:txBody>
@@ -9138,7 +9037,7 @@
                 </a:solidFill>
                 <a:latin typeface="Onest"/>
               </a:rPr>
-              <a:t>модерация витрины; отказ = нет релиза</a:t>
+              <a:t>Модерация витрины и требования к раскрытию, в том числе ИИ-контента. Отказ — релиза нет.</a:t>
             </a:r>
           </a:p>
         </p:txBody>
@@ -9177,7 +9076,7 @@
                 </a:solidFill>
                 <a:latin typeface="Onest"/>
               </a:rPr>
-              <a:t>Каждый шаг — отдельные ворота со своей ценой, и условия диктует витрина. Быть на всех витринах дорого — и это работает на тезис о горлышке.</a:t>
+              <a:t>Каждый шаг — отдельные ворота со своей ценой, и условия диктует витрина. Быть на всех витринах дорого — это и работает на тезис о горлышке.</a:t>
             </a:r>
           </a:p>
         </p:txBody>
@@ -9484,7 +9383,7 @@
                 </a:solidFill>
                 <a:latin typeface="Onest"/>
               </a:rPr>
-              <a:t>ежемесячных активных игроков Steam, 2025</a:t>
+              <a:t>ежемесячных активных игроков Steam</a:t>
             </a:r>
           </a:p>
         </p:txBody>
@@ -9562,7 +9461,7 @@
                 </a:solidFill>
                 <a:latin typeface="Onest"/>
               </a:rPr>
-              <a:t>рекордный одновременный онлайн Steam, март 2026</a:t>
+              <a:t>рекордный одновременный онлайн Steam</a:t>
             </a:r>
           </a:p>
         </p:txBody>
@@ -9675,7 +9574,7 @@
                 </a:solidFill>
                 <a:latin typeface="Onest"/>
               </a:rPr>
-              <a:t>аккаунтов в Epic Games Store при 8–10% доли</a:t>
+              <a:t>аккаунтов в Epic Games Store при доле 8–10%</a:t>
             </a:r>
           </a:p>
         </p:txBody>
@@ -9834,7 +9733,7 @@
                 </a:solidFill>
                 <a:latin typeface="Onest"/>
               </a:rPr>
-              <a:t>MAU и одновременный онлайн — размер аккаунтной базы; размер библиотек и вишлистов — накопленное удержание; число и объём отзывов — доверие.</a:t>
+              <a:t>Аудиторию — MAU и одновременный онлайн. Удержание — размер библиотек и вишлистов. Деньги — выручку витрины и среднюю трату на аккаунт.</a:t>
             </a:r>
           </a:p>
         </p:txBody>
@@ -9958,7 +9857,7 @@
                 </a:solidFill>
                 <a:latin typeface="Onest"/>
               </a:rPr>
-              <a:t>Публичного размера библиотек и вишлистов по платформам. Пока не измерили — не заявляем как объект; это открытая задача.</a:t>
+              <a:t>Публичных данных по размеру библиотек и вишлистов. Пока не измерили — не заявляем как объект. Это открытая задача, а не готовый вывод.</a:t>
             </a:r>
           </a:p>
         </p:txBody>
@@ -11245,7 +11144,7 @@
                 </a:solidFill>
                 <a:latin typeface="Onest"/>
               </a:rPr>
-              <a:t>Доля витрины у Epic — 8–10%, но 42% студий делают игры на его движке. Сила на этаже 03 финансирует борьбу на этаже 08: эксклюзивы, бесплатные раздачи, комиссия 12%, 0% роялти в своём магазине. Valorant сделан Riot на Unreal — Epic получает роялти с чужого хита. Доля на одном этаже — не мера силы компании.</a:t>
+              <a:t>Доля витрины у Epic — 8–10%, но 42% студий делают игры на его движке. Сила на этаже 03 финансирует борьбу на этаже 08: эксклюзивы, раздачи, комиссия 12%, 0% роялти в своём магазине. Valorant сделан Riot на Unreal — Epic получает роялти с чужого хита. Доля на одном этаже — не мера силы компании.</a:t>
             </a:r>
           </a:p>
         </p:txBody>
@@ -11284,7 +11183,7 @@
                 </a:solidFill>
                 <a:latin typeface="Onest"/>
               </a:rPr>
-              <a:t>Гипотеза Владимира к проверке: ценность магазина для Epic — не выручка, а доверие игроков и разработчиков к экосистеме Unreal.</a:t>
+              <a:t>Отсюда вопрос к проверке: возможно, магазин нужен Epic не ради выручки, а ради доверия разработчиков к экосистеме Unreal.</a:t>
             </a:r>
           </a:p>
         </p:txBody>
@@ -11487,12 +11386,12 @@
         </p:nvSpPr>
         <p:spPr>
           <a:xfrm>
-            <a:off x="594360" y="2286000"/>
-            <a:ext cx="11002975" cy="1143000"/>
+            <a:off x="594360" y="2148840"/>
+            <a:ext cx="11002975" cy="786384"/>
           </a:xfrm>
           <a:prstGeom prst="roundRect">
             <a:avLst>
-              <a:gd name="adj" fmla="val 11200"/>
+              <a:gd name="adj" fmla="val 16279"/>
             </a:avLst>
           </a:prstGeom>
           <a:solidFill>
@@ -11533,7 +11432,7 @@
         </p:nvSpPr>
         <p:spPr>
           <a:xfrm>
-            <a:off x="868680" y="2487168"/>
+            <a:off x="868680" y="2350008"/>
             <a:ext cx="4952847" cy="274320"/>
           </a:xfrm>
           <a:prstGeom prst="rect">
@@ -11572,7 +11471,7 @@
         </p:nvSpPr>
         <p:spPr>
           <a:xfrm>
-            <a:off x="868680" y="2788920"/>
+            <a:off x="868680" y="2651760"/>
             <a:ext cx="4952847" cy="548640"/>
           </a:xfrm>
           <a:prstGeom prst="rect">
@@ -11598,7 +11497,7 @@
                 </a:solidFill>
                 <a:latin typeface="Onest"/>
               </a:rPr>
-              <a:t>выбор студий: раз выбрали — живут годами</a:t>
+              <a:t>Производственный стандарт: выбрал один раз — живёшь в нём годами</a:t>
             </a:r>
           </a:p>
         </p:txBody>
@@ -11611,7 +11510,7 @@
         </p:nvSpPr>
         <p:spPr>
           <a:xfrm>
-            <a:off x="6735927" y="2487168"/>
+            <a:off x="6735927" y="2350008"/>
             <a:ext cx="4952847" cy="274320"/>
           </a:xfrm>
           <a:prstGeom prst="rect">
@@ -11650,7 +11549,7 @@
         </p:nvSpPr>
         <p:spPr>
           <a:xfrm>
-            <a:off x="6735927" y="2788920"/>
+            <a:off x="6735927" y="2651760"/>
             <a:ext cx="4952847" cy="548640"/>
           </a:xfrm>
           <a:prstGeom prst="rect">
@@ -11676,7 +11575,7 @@
                 </a:solidFill>
                 <a:latin typeface="Onest"/>
               </a:rPr>
-              <a:t>контракты: торгуются заново на каждом проекте</a:t>
+              <a:t>Контракты: торгуешься заново на каждом проекте</a:t>
             </a:r>
           </a:p>
         </p:txBody>
@@ -11689,8 +11588,8 @@
         </p:nvSpPr>
         <p:spPr>
           <a:xfrm>
-            <a:off x="6004407" y="2286000"/>
-            <a:ext cx="731520" cy="1143000"/>
+            <a:off x="6004407" y="2148840"/>
+            <a:ext cx="731520" cy="786384"/>
           </a:xfrm>
           <a:prstGeom prst="rect">
             <a:avLst/>
@@ -11728,12 +11627,12 @@
         </p:nvSpPr>
         <p:spPr>
           <a:xfrm>
-            <a:off x="594360" y="3593591"/>
-            <a:ext cx="11002975" cy="1143000"/>
+            <a:off x="594360" y="3044952"/>
+            <a:ext cx="11002975" cy="786384"/>
           </a:xfrm>
           <a:prstGeom prst="roundRect">
             <a:avLst>
-              <a:gd name="adj" fmla="val 11200"/>
+              <a:gd name="adj" fmla="val 16279"/>
             </a:avLst>
           </a:prstGeom>
           <a:solidFill>
@@ -11774,7 +11673,7 @@
         </p:nvSpPr>
         <p:spPr>
           <a:xfrm>
-            <a:off x="868680" y="3794759"/>
+            <a:off x="868680" y="3246120"/>
             <a:ext cx="4952847" cy="274320"/>
           </a:xfrm>
           <a:prstGeom prst="rect">
@@ -11800,6 +11699,84 @@
                 </a:solidFill>
                 <a:latin typeface="Onest"/>
               </a:rPr>
+              <a:t>04 · АУТСОРС</a:t>
+            </a:r>
+          </a:p>
+        </p:txBody>
+      </p:sp>
+      <p:sp>
+        <p:nvSpPr>
+          <p:cNvPr id="14" name="TextBox 13"/>
+          <p:cNvSpPr txBox="1"/>
+          <p:nvPr/>
+        </p:nvSpPr>
+        <p:spPr>
+          <a:xfrm>
+            <a:off x="868680" y="3547872"/>
+            <a:ext cx="4952847" cy="548640"/>
+          </a:xfrm>
+          <a:prstGeom prst="rect">
+            <a:avLst/>
+          </a:prstGeom>
+          <a:noFill/>
+        </p:spPr>
+        <p:txBody>
+          <a:bodyPr wrap="square" lIns="0" rIns="0" tIns="0" bIns="0" anchor="t">
+            <a:spAutoFit/>
+          </a:bodyPr>
+          <a:lstStyle/>
+          <a:p>
+            <a:pPr algn="l">
+              <a:lnSpc>
+                <a:spcPct val="115000"/>
+              </a:lnSpc>
+            </a:pPr>
+            <a:r>
+              <a:rPr sz="1400" b="1">
+                <a:solidFill>
+                  <a:srgbClr val="16140F"/>
+                </a:solidFill>
+                <a:latin typeface="Onest"/>
+              </a:rPr>
+              <a:t>Продаёт кусок работы по договору — и уходит</a:t>
+            </a:r>
+          </a:p>
+        </p:txBody>
+      </p:sp>
+      <p:sp>
+        <p:nvSpPr>
+          <p:cNvPr id="15" name="TextBox 14"/>
+          <p:cNvSpPr txBox="1"/>
+          <p:nvPr/>
+        </p:nvSpPr>
+        <p:spPr>
+          <a:xfrm>
+            <a:off x="6735927" y="3246120"/>
+            <a:ext cx="4952847" cy="274320"/>
+          </a:xfrm>
+          <a:prstGeom prst="rect">
+            <a:avLst/>
+          </a:prstGeom>
+          <a:noFill/>
+        </p:spPr>
+        <p:txBody>
+          <a:bodyPr wrap="square" lIns="0" rIns="0" tIns="0" bIns="0" anchor="t">
+            <a:spAutoFit/>
+          </a:bodyPr>
+          <a:lstStyle/>
+          <a:p>
+            <a:pPr algn="l">
+              <a:lnSpc>
+                <a:spcPct val="125000"/>
+              </a:lnSpc>
+            </a:pPr>
+            <a:r>
+              <a:rPr sz="950" b="1">
+                <a:solidFill>
+                  <a:srgbClr val="6B6558"/>
+                </a:solidFill>
+                <a:latin typeface="Onest"/>
+              </a:rPr>
               <a:t>05 · РАЗРАБОТКА</a:t>
             </a:r>
           </a:p>
@@ -11807,13 +11784,13 @@
       </p:sp>
       <p:sp>
         <p:nvSpPr>
-          <p:cNvPr id="14" name="TextBox 13"/>
-          <p:cNvSpPr txBox="1"/>
-          <p:nvPr/>
-        </p:nvSpPr>
-        <p:spPr>
-          <a:xfrm>
-            <a:off x="868680" y="4096511"/>
+          <p:cNvPr id="16" name="TextBox 15"/>
+          <p:cNvSpPr txBox="1"/>
+          <p:nvPr/>
+        </p:nvSpPr>
+        <p:spPr>
+          <a:xfrm>
+            <a:off x="6735927" y="3547872"/>
             <a:ext cx="4952847" cy="548640"/>
           </a:xfrm>
           <a:prstGeom prst="rect">
@@ -11839,85 +11816,7 @@
                 </a:solidFill>
                 <a:latin typeface="Onest"/>
               </a:rPr>
-              <a:t>какую игру выберет игрок</a:t>
-            </a:r>
-          </a:p>
-        </p:txBody>
-      </p:sp>
-      <p:sp>
-        <p:nvSpPr>
-          <p:cNvPr id="15" name="TextBox 14"/>
-          <p:cNvSpPr txBox="1"/>
-          <p:nvPr/>
-        </p:nvSpPr>
-        <p:spPr>
-          <a:xfrm>
-            <a:off x="6735927" y="3794759"/>
-            <a:ext cx="4952847" cy="274320"/>
-          </a:xfrm>
-          <a:prstGeom prst="rect">
-            <a:avLst/>
-          </a:prstGeom>
-          <a:noFill/>
-        </p:spPr>
-        <p:txBody>
-          <a:bodyPr wrap="square" lIns="0" rIns="0" tIns="0" bIns="0" anchor="t">
-            <a:spAutoFit/>
-          </a:bodyPr>
-          <a:lstStyle/>
-          <a:p>
-            <a:pPr algn="l">
-              <a:lnSpc>
-                <a:spcPct val="125000"/>
-              </a:lnSpc>
-            </a:pPr>
-            <a:r>
-              <a:rPr sz="950" b="1">
-                <a:solidFill>
-                  <a:srgbClr val="6B6558"/>
-                </a:solidFill>
-                <a:latin typeface="Onest"/>
-              </a:rPr>
-              <a:t>06 · ИЗДАНИЕ</a:t>
-            </a:r>
-          </a:p>
-        </p:txBody>
-      </p:sp>
-      <p:sp>
-        <p:nvSpPr>
-          <p:cNvPr id="16" name="TextBox 15"/>
-          <p:cNvSpPr txBox="1"/>
-          <p:nvPr/>
-        </p:nvSpPr>
-        <p:spPr>
-          <a:xfrm>
-            <a:off x="6735927" y="4096511"/>
-            <a:ext cx="4952847" cy="548640"/>
-          </a:xfrm>
-          <a:prstGeom prst="rect">
-            <a:avLst/>
-          </a:prstGeom>
-          <a:noFill/>
-        </p:spPr>
-        <p:txBody>
-          <a:bodyPr wrap="square" lIns="0" rIns="0" tIns="0" bIns="0" anchor="t">
-            <a:spAutoFit/>
-          </a:bodyPr>
-          <a:lstStyle/>
-          <a:p>
-            <a:pPr algn="l">
-              <a:lnSpc>
-                <a:spcPct val="115000"/>
-              </a:lnSpc>
-            </a:pPr>
-            <a:r>
-              <a:rPr sz="1400" b="1">
-                <a:solidFill>
-                  <a:srgbClr val="16140F"/>
-                </a:solidFill>
-                <a:latin typeface="Onest"/>
-              </a:rPr>
-              <a:t>права на издание и релиз — не про игрока</a:t>
+              <a:t>Отвечает за целое: собирает куски в игру со своим почерком</a:t>
             </a:r>
           </a:p>
         </p:txBody>
@@ -11930,8 +11829,8 @@
         </p:nvSpPr>
         <p:spPr>
           <a:xfrm>
-            <a:off x="6004407" y="3593591"/>
-            <a:ext cx="731520" cy="1143000"/>
+            <a:off x="6004407" y="3044952"/>
+            <a:ext cx="731520" cy="786384"/>
           </a:xfrm>
           <a:prstGeom prst="rect">
             <a:avLst/>
@@ -11969,12 +11868,12 @@
         </p:nvSpPr>
         <p:spPr>
           <a:xfrm>
-            <a:off x="594360" y="4901183"/>
-            <a:ext cx="11002975" cy="1143000"/>
+            <a:off x="594360" y="3941064"/>
+            <a:ext cx="11002975" cy="786384"/>
           </a:xfrm>
           <a:prstGeom prst="roundRect">
             <a:avLst>
-              <a:gd name="adj" fmla="val 11200"/>
+              <a:gd name="adj" fmla="val 16279"/>
             </a:avLst>
           </a:prstGeom>
           <a:solidFill>
@@ -12015,7 +11914,7 @@
         </p:nvSpPr>
         <p:spPr>
           <a:xfrm>
-            <a:off x="868680" y="5102351"/>
+            <a:off x="868680" y="4142232"/>
             <a:ext cx="4952847" cy="274320"/>
           </a:xfrm>
           <a:prstGeom prst="rect">
@@ -12041,7 +11940,7 @@
                 </a:solidFill>
                 <a:latin typeface="Onest"/>
               </a:rPr>
-              <a:t>07 · ПЛАТФОРМА</a:t>
+              <a:t>05 · РАЗРАБОТКА</a:t>
             </a:r>
           </a:p>
         </p:txBody>
@@ -12054,7 +11953,7 @@
         </p:nvSpPr>
         <p:spPr>
           <a:xfrm>
-            <a:off x="868680" y="5404103"/>
+            <a:off x="868680" y="4443984"/>
             <a:ext cx="4952847" cy="548640"/>
           </a:xfrm>
           <a:prstGeom prst="rect">
@@ -12080,7 +11979,7 @@
                 </a:solidFill>
                 <a:latin typeface="Onest"/>
               </a:rPr>
-              <a:t>установленная база: у кого есть устройство</a:t>
+              <a:t>Почерк студии и уровень проработки — что игрок почувствует</a:t>
             </a:r>
           </a:p>
         </p:txBody>
@@ -12093,7 +11992,7 @@
         </p:nvSpPr>
         <p:spPr>
           <a:xfrm>
-            <a:off x="6735927" y="5102351"/>
+            <a:off x="6735927" y="4142232"/>
             <a:ext cx="4952847" cy="274320"/>
           </a:xfrm>
           <a:prstGeom prst="rect">
@@ -12119,7 +12018,7 @@
                 </a:solidFill>
                 <a:latin typeface="Onest"/>
               </a:rPr>
-              <a:t>08 · ВИТРИНА</a:t>
+              <a:t>06 · ИЗДАНИЕ</a:t>
             </a:r>
           </a:p>
         </p:txBody>
@@ -12132,7 +12031,7 @@
         </p:nvSpPr>
         <p:spPr>
           <a:xfrm>
-            <a:off x="6735927" y="5404103"/>
+            <a:off x="6735927" y="4443984"/>
             <a:ext cx="4952847" cy="548640"/>
           </a:xfrm>
           <a:prstGeom prst="rect">
@@ -12158,7 +12057,7 @@
                 </a:solidFill>
                 <a:latin typeface="Onest"/>
               </a:rPr>
-              <a:t>аккаунт и библиотека: где игрок живёт</a:t>
+              <a:t>Права на релиз и продвижение — не про ощущения игрока</a:t>
             </a:r>
           </a:p>
         </p:txBody>
@@ -12171,8 +12070,490 @@
         </p:nvSpPr>
         <p:spPr>
           <a:xfrm>
-            <a:off x="6004407" y="4901183"/>
-            <a:ext cx="731520" cy="1143000"/>
+            <a:off x="6004407" y="3941064"/>
+            <a:ext cx="731520" cy="786384"/>
+          </a:xfrm>
+          <a:prstGeom prst="rect">
+            <a:avLst/>
+          </a:prstGeom>
+          <a:noFill/>
+        </p:spPr>
+        <p:txBody>
+          <a:bodyPr wrap="square" lIns="0" rIns="0" tIns="0" bIns="0" anchor="ctr">
+            <a:spAutoFit/>
+          </a:bodyPr>
+          <a:lstStyle/>
+          <a:p>
+            <a:pPr algn="ctr">
+              <a:lnSpc>
+                <a:spcPct val="125000"/>
+              </a:lnSpc>
+            </a:pPr>
+            <a:r>
+              <a:rPr sz="2800" b="1">
+                <a:solidFill>
+                  <a:srgbClr val="F26A1B"/>
+                </a:solidFill>
+                <a:latin typeface="Onest"/>
+              </a:rPr>
+              <a:t>≠</a:t>
+            </a:r>
+          </a:p>
+        </p:txBody>
+      </p:sp>
+      <p:sp>
+        <p:nvSpPr>
+          <p:cNvPr id="24" name="Rounded Rectangle 23"/>
+          <p:cNvSpPr/>
+          <p:nvPr/>
+        </p:nvSpPr>
+        <p:spPr>
+          <a:xfrm>
+            <a:off x="594360" y="4837176"/>
+            <a:ext cx="11002975" cy="786384"/>
+          </a:xfrm>
+          <a:prstGeom prst="roundRect">
+            <a:avLst>
+              <a:gd name="adj" fmla="val 16279"/>
+            </a:avLst>
+          </a:prstGeom>
+          <a:solidFill>
+            <a:srgbClr val="FFFFFF"/>
+          </a:solidFill>
+          <a:ln>
+            <a:noFill/>
+          </a:ln>
+          <a:effectLst/>
+        </p:spPr>
+        <p:style>
+          <a:lnRef idx="1">
+            <a:schemeClr val="accent1"/>
+          </a:lnRef>
+          <a:fillRef idx="3">
+            <a:schemeClr val="accent1"/>
+          </a:fillRef>
+          <a:effectRef idx="2">
+            <a:schemeClr val="accent1"/>
+          </a:effectRef>
+          <a:fontRef idx="minor">
+            <a:schemeClr val="lt1"/>
+          </a:fontRef>
+        </p:style>
+        <p:txBody>
+          <a:bodyPr rtlCol="0" anchor="ctr"/>
+          <a:lstStyle/>
+          <a:p>
+            <a:pPr algn="ctr"/>
+          </a:p>
+        </p:txBody>
+      </p:sp>
+      <p:sp>
+        <p:nvSpPr>
+          <p:cNvPr id="25" name="TextBox 24"/>
+          <p:cNvSpPr txBox="1"/>
+          <p:nvPr/>
+        </p:nvSpPr>
+        <p:spPr>
+          <a:xfrm>
+            <a:off x="868680" y="5038344"/>
+            <a:ext cx="4952847" cy="274320"/>
+          </a:xfrm>
+          <a:prstGeom prst="rect">
+            <a:avLst/>
+          </a:prstGeom>
+          <a:noFill/>
+        </p:spPr>
+        <p:txBody>
+          <a:bodyPr wrap="square" lIns="0" rIns="0" tIns="0" bIns="0" anchor="t">
+            <a:spAutoFit/>
+          </a:bodyPr>
+          <a:lstStyle/>
+          <a:p>
+            <a:pPr algn="l">
+              <a:lnSpc>
+                <a:spcPct val="125000"/>
+              </a:lnSpc>
+            </a:pPr>
+            <a:r>
+              <a:rPr sz="950" b="1">
+                <a:solidFill>
+                  <a:srgbClr val="6B6558"/>
+                </a:solidFill>
+                <a:latin typeface="Onest"/>
+              </a:rPr>
+              <a:t>06 · ИЗДАНИЕ</a:t>
+            </a:r>
+          </a:p>
+        </p:txBody>
+      </p:sp>
+      <p:sp>
+        <p:nvSpPr>
+          <p:cNvPr id="26" name="TextBox 25"/>
+          <p:cNvSpPr txBox="1"/>
+          <p:nvPr/>
+        </p:nvSpPr>
+        <p:spPr>
+          <a:xfrm>
+            <a:off x="868680" y="5340096"/>
+            <a:ext cx="4952847" cy="548640"/>
+          </a:xfrm>
+          <a:prstGeom prst="rect">
+            <a:avLst/>
+          </a:prstGeom>
+          <a:noFill/>
+        </p:spPr>
+        <p:txBody>
+          <a:bodyPr wrap="square" lIns="0" rIns="0" tIns="0" bIns="0" anchor="t">
+            <a:spAutoFit/>
+          </a:bodyPr>
+          <a:lstStyle/>
+          <a:p>
+            <a:pPr algn="l">
+              <a:lnSpc>
+                <a:spcPct val="115000"/>
+              </a:lnSpc>
+            </a:pPr>
+            <a:r>
+              <a:rPr sz="1400" b="1">
+                <a:solidFill>
+                  <a:srgbClr val="16140F"/>
+                </a:solidFill>
+                <a:latin typeface="Onest"/>
+              </a:rPr>
+              <a:t>Право вывести игру на рынок и деньги на это</a:t>
+            </a:r>
+          </a:p>
+        </p:txBody>
+      </p:sp>
+      <p:sp>
+        <p:nvSpPr>
+          <p:cNvPr id="27" name="TextBox 26"/>
+          <p:cNvSpPr txBox="1"/>
+          <p:nvPr/>
+        </p:nvSpPr>
+        <p:spPr>
+          <a:xfrm>
+            <a:off x="6735927" y="5038344"/>
+            <a:ext cx="4952847" cy="274320"/>
+          </a:xfrm>
+          <a:prstGeom prst="rect">
+            <a:avLst/>
+          </a:prstGeom>
+          <a:noFill/>
+        </p:spPr>
+        <p:txBody>
+          <a:bodyPr wrap="square" lIns="0" rIns="0" tIns="0" bIns="0" anchor="t">
+            <a:spAutoFit/>
+          </a:bodyPr>
+          <a:lstStyle/>
+          <a:p>
+            <a:pPr algn="l">
+              <a:lnSpc>
+                <a:spcPct val="125000"/>
+              </a:lnSpc>
+            </a:pPr>
+            <a:r>
+              <a:rPr sz="950" b="1">
+                <a:solidFill>
+                  <a:srgbClr val="6B6558"/>
+                </a:solidFill>
+                <a:latin typeface="Onest"/>
+              </a:rPr>
+              <a:t>07 · ПЛАТФОРМЫ</a:t>
+            </a:r>
+          </a:p>
+        </p:txBody>
+      </p:sp>
+      <p:sp>
+        <p:nvSpPr>
+          <p:cNvPr id="28" name="TextBox 27"/>
+          <p:cNvSpPr txBox="1"/>
+          <p:nvPr/>
+        </p:nvSpPr>
+        <p:spPr>
+          <a:xfrm>
+            <a:off x="6735927" y="5340096"/>
+            <a:ext cx="4952847" cy="548640"/>
+          </a:xfrm>
+          <a:prstGeom prst="rect">
+            <a:avLst/>
+          </a:prstGeom>
+          <a:noFill/>
+        </p:spPr>
+        <p:txBody>
+          <a:bodyPr wrap="square" lIns="0" rIns="0" tIns="0" bIns="0" anchor="t">
+            <a:spAutoFit/>
+          </a:bodyPr>
+          <a:lstStyle/>
+          <a:p>
+            <a:pPr algn="l">
+              <a:lnSpc>
+                <a:spcPct val="115000"/>
+              </a:lnSpc>
+            </a:pPr>
+            <a:r>
+              <a:rPr sz="1400" b="1">
+                <a:solidFill>
+                  <a:srgbClr val="16140F"/>
+                </a:solidFill>
+                <a:latin typeface="Onest"/>
+              </a:rPr>
+              <a:t>Установленная база: у кого физически есть устройство</a:t>
+            </a:r>
+          </a:p>
+        </p:txBody>
+      </p:sp>
+      <p:sp>
+        <p:nvSpPr>
+          <p:cNvPr id="29" name="TextBox 28"/>
+          <p:cNvSpPr txBox="1"/>
+          <p:nvPr/>
+        </p:nvSpPr>
+        <p:spPr>
+          <a:xfrm>
+            <a:off x="6004407" y="4837176"/>
+            <a:ext cx="731520" cy="786384"/>
+          </a:xfrm>
+          <a:prstGeom prst="rect">
+            <a:avLst/>
+          </a:prstGeom>
+          <a:noFill/>
+        </p:spPr>
+        <p:txBody>
+          <a:bodyPr wrap="square" lIns="0" rIns="0" tIns="0" bIns="0" anchor="ctr">
+            <a:spAutoFit/>
+          </a:bodyPr>
+          <a:lstStyle/>
+          <a:p>
+            <a:pPr algn="ctr">
+              <a:lnSpc>
+                <a:spcPct val="125000"/>
+              </a:lnSpc>
+            </a:pPr>
+            <a:r>
+              <a:rPr sz="2800" b="1">
+                <a:solidFill>
+                  <a:srgbClr val="F26A1B"/>
+                </a:solidFill>
+                <a:latin typeface="Onest"/>
+              </a:rPr>
+              <a:t>≠</a:t>
+            </a:r>
+          </a:p>
+        </p:txBody>
+      </p:sp>
+      <p:sp>
+        <p:nvSpPr>
+          <p:cNvPr id="30" name="Rounded Rectangle 29"/>
+          <p:cNvSpPr/>
+          <p:nvPr/>
+        </p:nvSpPr>
+        <p:spPr>
+          <a:xfrm>
+            <a:off x="594360" y="5733288"/>
+            <a:ext cx="11002975" cy="786384"/>
+          </a:xfrm>
+          <a:prstGeom prst="roundRect">
+            <a:avLst>
+              <a:gd name="adj" fmla="val 16279"/>
+            </a:avLst>
+          </a:prstGeom>
+          <a:solidFill>
+            <a:srgbClr val="FFFFFF"/>
+          </a:solidFill>
+          <a:ln>
+            <a:noFill/>
+          </a:ln>
+          <a:effectLst/>
+        </p:spPr>
+        <p:style>
+          <a:lnRef idx="1">
+            <a:schemeClr val="accent1"/>
+          </a:lnRef>
+          <a:fillRef idx="3">
+            <a:schemeClr val="accent1"/>
+          </a:fillRef>
+          <a:effectRef idx="2">
+            <a:schemeClr val="accent1"/>
+          </a:effectRef>
+          <a:fontRef idx="minor">
+            <a:schemeClr val="lt1"/>
+          </a:fontRef>
+        </p:style>
+        <p:txBody>
+          <a:bodyPr rtlCol="0" anchor="ctr"/>
+          <a:lstStyle/>
+          <a:p>
+            <a:pPr algn="ctr"/>
+          </a:p>
+        </p:txBody>
+      </p:sp>
+      <p:sp>
+        <p:nvSpPr>
+          <p:cNvPr id="31" name="TextBox 30"/>
+          <p:cNvSpPr txBox="1"/>
+          <p:nvPr/>
+        </p:nvSpPr>
+        <p:spPr>
+          <a:xfrm>
+            <a:off x="868680" y="5934456"/>
+            <a:ext cx="4952847" cy="274320"/>
+          </a:xfrm>
+          <a:prstGeom prst="rect">
+            <a:avLst/>
+          </a:prstGeom>
+          <a:noFill/>
+        </p:spPr>
+        <p:txBody>
+          <a:bodyPr wrap="square" lIns="0" rIns="0" tIns="0" bIns="0" anchor="t">
+            <a:spAutoFit/>
+          </a:bodyPr>
+          <a:lstStyle/>
+          <a:p>
+            <a:pPr algn="l">
+              <a:lnSpc>
+                <a:spcPct val="125000"/>
+              </a:lnSpc>
+            </a:pPr>
+            <a:r>
+              <a:rPr sz="950" b="1">
+                <a:solidFill>
+                  <a:srgbClr val="6B6558"/>
+                </a:solidFill>
+                <a:latin typeface="Onest"/>
+              </a:rPr>
+              <a:t>07 · ПЛАТФОРМЫ</a:t>
+            </a:r>
+          </a:p>
+        </p:txBody>
+      </p:sp>
+      <p:sp>
+        <p:nvSpPr>
+          <p:cNvPr id="32" name="TextBox 31"/>
+          <p:cNvSpPr txBox="1"/>
+          <p:nvPr/>
+        </p:nvSpPr>
+        <p:spPr>
+          <a:xfrm>
+            <a:off x="868680" y="6236208"/>
+            <a:ext cx="4952847" cy="548640"/>
+          </a:xfrm>
+          <a:prstGeom prst="rect">
+            <a:avLst/>
+          </a:prstGeom>
+          <a:noFill/>
+        </p:spPr>
+        <p:txBody>
+          <a:bodyPr wrap="square" lIns="0" rIns="0" tIns="0" bIns="0" anchor="t">
+            <a:spAutoFit/>
+          </a:bodyPr>
+          <a:lstStyle/>
+          <a:p>
+            <a:pPr algn="l">
+              <a:lnSpc>
+                <a:spcPct val="115000"/>
+              </a:lnSpc>
+            </a:pPr>
+            <a:r>
+              <a:rPr sz="1400" b="1">
+                <a:solidFill>
+                  <a:srgbClr val="16140F"/>
+                </a:solidFill>
+                <a:latin typeface="Onest"/>
+              </a:rPr>
+              <a:t>Возможность запустить — железо и API</a:t>
+            </a:r>
+          </a:p>
+        </p:txBody>
+      </p:sp>
+      <p:sp>
+        <p:nvSpPr>
+          <p:cNvPr id="33" name="TextBox 32"/>
+          <p:cNvSpPr txBox="1"/>
+          <p:nvPr/>
+        </p:nvSpPr>
+        <p:spPr>
+          <a:xfrm>
+            <a:off x="6735927" y="5934456"/>
+            <a:ext cx="4952847" cy="274320"/>
+          </a:xfrm>
+          <a:prstGeom prst="rect">
+            <a:avLst/>
+          </a:prstGeom>
+          <a:noFill/>
+        </p:spPr>
+        <p:txBody>
+          <a:bodyPr wrap="square" lIns="0" rIns="0" tIns="0" bIns="0" anchor="t">
+            <a:spAutoFit/>
+          </a:bodyPr>
+          <a:lstStyle/>
+          <a:p>
+            <a:pPr algn="l">
+              <a:lnSpc>
+                <a:spcPct val="125000"/>
+              </a:lnSpc>
+            </a:pPr>
+            <a:r>
+              <a:rPr sz="950" b="1">
+                <a:solidFill>
+                  <a:srgbClr val="6B6558"/>
+                </a:solidFill>
+                <a:latin typeface="Onest"/>
+              </a:rPr>
+              <a:t>08 · ВИТРИНЫ</a:t>
+            </a:r>
+          </a:p>
+        </p:txBody>
+      </p:sp>
+      <p:sp>
+        <p:nvSpPr>
+          <p:cNvPr id="34" name="TextBox 33"/>
+          <p:cNvSpPr txBox="1"/>
+          <p:nvPr/>
+        </p:nvSpPr>
+        <p:spPr>
+          <a:xfrm>
+            <a:off x="6735927" y="6236208"/>
+            <a:ext cx="4952847" cy="548640"/>
+          </a:xfrm>
+          <a:prstGeom prst="rect">
+            <a:avLst/>
+          </a:prstGeom>
+          <a:noFill/>
+        </p:spPr>
+        <p:txBody>
+          <a:bodyPr wrap="square" lIns="0" rIns="0" tIns="0" bIns="0" anchor="t">
+            <a:spAutoFit/>
+          </a:bodyPr>
+          <a:lstStyle/>
+          <a:p>
+            <a:pPr algn="l">
+              <a:lnSpc>
+                <a:spcPct val="115000"/>
+              </a:lnSpc>
+            </a:pPr>
+            <a:r>
+              <a:rPr sz="1400" b="1">
+                <a:solidFill>
+                  <a:srgbClr val="16140F"/>
+                </a:solidFill>
+                <a:latin typeface="Onest"/>
+              </a:rPr>
+              <a:t>Время игрока и его LTV — где он живёт и платит</a:t>
+            </a:r>
+          </a:p>
+        </p:txBody>
+      </p:sp>
+      <p:sp>
+        <p:nvSpPr>
+          <p:cNvPr id="35" name="TextBox 34"/>
+          <p:cNvSpPr txBox="1"/>
+          <p:nvPr/>
+        </p:nvSpPr>
+        <p:spPr>
+          <a:xfrm>
+            <a:off x="6004407" y="5733288"/>
+            <a:ext cx="731520" cy="786384"/>
           </a:xfrm>
           <a:prstGeom prst="rect">
             <a:avLst/>
@@ -14735,7 +15116,7 @@
                 </a:solidFill>
                 <a:latin typeface="Onest"/>
               </a:rPr>
-              <a:t>Меняешь. Рынок аутсорса — около $9 млрд и сотни студий.</a:t>
+              <a:t>Меняешь. Сотни студий, профили пересекаются.</a:t>
             </a:r>
           </a:p>
         </p:txBody>
@@ -16250,7 +16631,7 @@
                 </a:solidFill>
                 <a:latin typeface="Onest"/>
               </a:rPr>
-              <a:t>Sony убрала игру 18.12.2020 и вернула деньги всем. Вернулась 21.06.2021. Акции CD Projekt — минус 20% за день.</a:t>
+              <a:t>Sony убрала игру 18.12.2020 и вернула деньги всем. Вернулась 21.06.2021.  Акции CD Projekt — минус 20% за день</a:t>
             </a:r>
           </a:p>
         </p:txBody>
@@ -16481,7 +16862,7 @@
                 </a:solidFill>
                 <a:latin typeface="Onest"/>
               </a:rPr>
-              <a:t>Apple удалила игру в августе 2020-го. Вернулась в американский App Store в мае 2025-го. Пять лет игры не существовало для iOS.</a:t>
+              <a:t>Apple удалила игру в августе 2020-го. Вернулась в американский App Store в мае 2025-го.  Пять лет игры не существовало для iOS</a:t>
             </a:r>
           </a:p>
         </p:txBody>
@@ -16712,7 +17093,7 @@
                 </a:solidFill>
                 <a:latin typeface="Onest"/>
               </a:rPr>
-              <a:t>На релизе 21.02.2023 страница в Steam была недоступна в регионе. В российском Steam — только в августе 2026-го.</a:t>
+              <a:t>На релизе 21.02.2023 страница в Steam была недоступна в регионе.  Больше трёх лет без Steam в России</a:t>
             </a:r>
           </a:p>
         </p:txBody>
@@ -18463,7 +18844,7 @@
                           </a:solidFill>
                           <a:latin typeface="Onest"/>
                         </a:rPr>
-                        <a:t>этаж 08, горлышко</a:t>
+                        <a:t>этажи 08, горлышко</a:t>
                       </a:r>
                     </a:p>
                   </a:txBody>
@@ -18579,7 +18960,7 @@
                           </a:solidFill>
                           <a:latin typeface="Onest"/>
                         </a:rPr>
-                        <a:t>Epic Games Store: 295 млн аккаунтов, $1,09 млрд трат за год</a:t>
+                        <a:t>Epic Games Store: 295 млн аккаунтов</a:t>
                       </a:r>
                     </a:p>
                   </a:txBody>
@@ -18786,7 +19167,7 @@
                           </a:solidFill>
                           <a:latin typeface="Onest"/>
                         </a:rPr>
-                        <a:t>Google Play 30%, 15% на первый $1 млн</a:t>
+                        <a:t>Google Play 30%, 15% на первый $1 млн в год с разработчика</a:t>
                       </a:r>
                     </a:p>
                   </a:txBody>
@@ -18855,6 +19236,75 @@
                           </a:solidFill>
                           <a:latin typeface="Onest"/>
                         </a:rPr>
+                        <a:t>Steam требует раскрывать ИИ-контент: pre-generated и live-generated</a:t>
+                      </a:r>
+                    </a:p>
+                  </a:txBody>
+                  <a:tcPr marL="91440" marR="91440" marT="36576" marB="36576">
+                    <a:solidFill>
+                      <a:srgbClr val="FFFFFF"/>
+                    </a:solidFill>
+                  </a:tcPr>
+                </a:tc>
+                <a:tc>
+                  <a:txBody>
+                    <a:bodyPr wrap="square"/>
+                    <a:lstStyle/>
+                    <a:p>
+                      <a:r>
+                        <a:rPr sz="1000" b="0">
+                          <a:solidFill>
+                            <a:srgbClr val="6B6558"/>
+                          </a:solidFill>
+                          <a:latin typeface="Onest"/>
+                        </a:rPr>
+                        <a:t>правила контента</a:t>
+                      </a:r>
+                    </a:p>
+                  </a:txBody>
+                  <a:tcPr marL="91440" marR="91440" marT="36576" marB="36576">
+                    <a:solidFill>
+                      <a:srgbClr val="FFFFFF"/>
+                    </a:solidFill>
+                  </a:tcPr>
+                </a:tc>
+                <a:tc>
+                  <a:txBody>
+                    <a:bodyPr wrap="square"/>
+                    <a:lstStyle/>
+                    <a:p>
+                      <a:r>
+                        <a:rPr sz="1000" b="1">
+                          <a:solidFill>
+                            <a:srgbClr val="B34405"/>
+                          </a:solidFill>
+                          <a:latin typeface="Onest"/>
+                          <a:hlinkClick r:id="rId9"/>
+                        </a:rPr>
+                        <a:t>partner.steamgames.com</a:t>
+                      </a:r>
+                    </a:p>
+                  </a:txBody>
+                  <a:tcPr marL="91440" marR="91440" marT="36576" marB="36576">
+                    <a:solidFill>
+                      <a:srgbClr val="FFFFFF"/>
+                    </a:solidFill>
+                  </a:tcPr>
+                </a:tc>
+              </a:tr>
+              <a:tr h="280035">
+                <a:tc>
+                  <a:txBody>
+                    <a:bodyPr wrap="square"/>
+                    <a:lstStyle/>
+                    <a:p>
+                      <a:r>
+                        <a:rPr sz="1000" b="1">
+                          <a:solidFill>
+                            <a:srgbClr val="16140F"/>
+                          </a:solidFill>
+                          <a:latin typeface="Onest"/>
+                        </a:rPr>
                         <a:t>CD Projekt: переход с REDengine на Unreal Engine 5, март 2022</a:t>
                       </a:r>
                     </a:p>
@@ -18898,78 +19348,9 @@
                             <a:srgbClr val="B34405"/>
                           </a:solidFill>
                           <a:latin typeface="Onest"/>
-                          <a:hlinkClick r:id="rId9"/>
+                          <a:hlinkClick r:id="rId10"/>
                         </a:rPr>
                         <a:t>cdprojekt.com</a:t>
-                      </a:r>
-                    </a:p>
-                  </a:txBody>
-                  <a:tcPr marL="91440" marR="91440" marT="36576" marB="36576">
-                    <a:solidFill>
-                      <a:srgbClr val="FFFFFF"/>
-                    </a:solidFill>
-                  </a:tcPr>
-                </a:tc>
-              </a:tr>
-              <a:tr h="280035">
-                <a:tc>
-                  <a:txBody>
-                    <a:bodyPr wrap="square"/>
-                    <a:lstStyle/>
-                    <a:p>
-                      <a:r>
-                        <a:rPr sz="1000" b="1">
-                          <a:solidFill>
-                            <a:srgbClr val="16140F"/>
-                          </a:solidFill>
-                          <a:latin typeface="Onest"/>
-                        </a:rPr>
-                        <a:t>Аутсорс ≈ $9 млрд, 2025 (другие отчёты: $4–9 млрд)</a:t>
-                      </a:r>
-                    </a:p>
-                  </a:txBody>
-                  <a:tcPr marL="91440" marR="91440" marT="36576" marB="36576">
-                    <a:solidFill>
-                      <a:srgbClr val="FFFFFF"/>
-                    </a:solidFill>
-                  </a:tcPr>
-                </a:tc>
-                <a:tc>
-                  <a:txBody>
-                    <a:bodyPr wrap="square"/>
-                    <a:lstStyle/>
-                    <a:p>
-                      <a:r>
-                        <a:rPr sz="1000" b="0">
-                          <a:solidFill>
-                            <a:srgbClr val="6B6558"/>
-                          </a:solidFill>
-                          <a:latin typeface="Onest"/>
-                        </a:rPr>
-                        <a:t>тест отказом</a:t>
-                      </a:r>
-                    </a:p>
-                  </a:txBody>
-                  <a:tcPr marL="91440" marR="91440" marT="36576" marB="36576">
-                    <a:solidFill>
-                      <a:srgbClr val="FFFFFF"/>
-                    </a:solidFill>
-                  </a:tcPr>
-                </a:tc>
-                <a:tc>
-                  <a:txBody>
-                    <a:bodyPr wrap="square"/>
-                    <a:lstStyle/>
-                    <a:p>
-                      <a:r>
-                        <a:rPr sz="1000" b="1">
-                          <a:solidFill>
-                            <a:srgbClr val="B34405"/>
-                          </a:solidFill>
-                          <a:latin typeface="Onest"/>
-                          <a:hlinkClick r:id="rId10"/>
-                        </a:rPr>
-                        <a:t>verifiedmarketreports.com</a:t>
                       </a:r>
                     </a:p>
                   </a:txBody>
@@ -19406,7 +19787,7 @@
         </p:nvSpPr>
         <p:spPr>
           <a:xfrm>
-            <a:off x="594360" y="6355080"/>
+            <a:off x="594360" y="6309360"/>
             <a:ext cx="11002975" cy="411480"/>
           </a:xfrm>
           <a:prstGeom prst="rect">
@@ -19432,7 +19813,7 @@
                 </a:solidFill>
                 <a:latin typeface="Onest"/>
               </a:rPr>
-              <a:t>Консольные комиссии (≈30%) платформы публично не раскрывают — указаны как оценка, без ссылки.</a:t>
+              <a:t>Консольные комиссии (около 30%) платформы публично не раскрывают — указаны как оценка. Аудиторные метрики Steam и Epic взяты из одного агрегатора каждая и второй независимой публикацией не подтверждены.</a:t>
             </a:r>
           </a:p>
         </p:txBody>
@@ -19745,7 +20126,7 @@
                 </a:solidFill>
                 <a:latin typeface="Onest"/>
               </a:rPr>
-              <a:t>Борьба за то, чего на всех не хватает. Всегда за что-то конкретное.</a:t>
+              <a:t>Борьба за то, чего на всех не хватает. Всегда за что-то конкретное: если объект не назван, слово пустое.</a:t>
             </a:r>
           </a:p>
         </p:txBody>
@@ -19830,7 +20211,7 @@
                 </a:solidFill>
                 <a:latin typeface="Onest"/>
               </a:rPr>
-              <a:t>Барьер входа</a:t>
+              <a:t>Объект конкуренции</a:t>
             </a:r>
           </a:p>
         </p:txBody>
@@ -19869,7 +20250,7 @@
                 </a:solidFill>
                 <a:latin typeface="Onest"/>
               </a:rPr>
-              <a:t>Что мешает новому игроку занять уровень. Чем выше — тем дольше держится горлышко.</a:t>
+              <a:t>То, обладание чем даёт преимущество. На каждом этаже свой. Не деньги и не доля рынка — это следствие. Если объект нельзя измерить, мы его не называем.</a:t>
             </a:r>
           </a:p>
         </p:txBody>
@@ -19954,7 +20335,7 @@
                 </a:solidFill>
                 <a:latin typeface="Onest"/>
               </a:rPr>
-              <a:t>Объект конкуренции</a:t>
+              <a:t>Уровень (этаж)</a:t>
             </a:r>
           </a:p>
         </p:txBody>
@@ -19993,7 +20374,7 @@
                 </a:solidFill>
                 <a:latin typeface="Onest"/>
               </a:rPr>
-              <a:t>То, обладание которым даёт преимущество. На каждом этаже свой. Если нельзя измерить — не называем.</a:t>
+              <a:t>Место в отрасли, где есть свой объект конкуренции. Не шаг процесса: этажи существуют параллельно, одна компания может стоять на нескольких.</a:t>
             </a:r>
           </a:p>
         </p:txBody>
@@ -20078,7 +20459,7 @@
                 </a:solidFill>
                 <a:latin typeface="Onest"/>
               </a:rPr>
-              <a:t>Зависимость в цепочке</a:t>
+              <a:t>Барьер входа</a:t>
             </a:r>
           </a:p>
         </p:txBody>
@@ -20117,7 +20498,7 @@
                 </a:solidFill>
                 <a:latin typeface="Onest"/>
               </a:rPr>
-              <a:t>Насколько жёстко уровень нуждается в соседнем. Меряется отказом.</a:t>
+              <a:t>То, что мешает новому игроку занять уровень: право, стандарт, накопленная база, сертификация. Чем выше барьер, тем дольше держится горлышко.</a:t>
             </a:r>
           </a:p>
         </p:txBody>
@@ -20202,7 +20583,7 @@
                 </a:solidFill>
                 <a:latin typeface="Onest"/>
               </a:rPr>
-              <a:t>Бутылочное горлышко</a:t>
+              <a:t>Зависимость в цепочке</a:t>
             </a:r>
           </a:p>
         </p:txBody>
@@ -20241,7 +20622,7 @@
                 </a:solidFill>
                 <a:latin typeface="Onest"/>
               </a:rPr>
-              <a:t>Уровень, где мало игроков, а зависят от них все.</a:t>
+              <a:t>Насколько жёстко уровень нуждается в соседнем. Меряется тестом отказом: что будет с цепочкой, если уровень откажет, и есть ли чем заменить.</a:t>
             </a:r>
           </a:p>
         </p:txBody>
@@ -20326,7 +20707,7 @@
                 </a:solidFill>
                 <a:latin typeface="Onest"/>
               </a:rPr>
-              <a:t>Уровень</a:t>
+              <a:t>Бутылочное горлышко</a:t>
             </a:r>
           </a:p>
         </p:txBody>
@@ -20365,7 +20746,7 @@
                 </a:solidFill>
                 <a:latin typeface="Onest"/>
               </a:rPr>
-              <a:t>Место, где есть свой объект конкуренции. Не шаг процесса.</a:t>
+              <a:t>Уровень, где мало игроков, а зависят от них все. Там сосредоточена власть над всей цепочкой. Мало игроков само по себе — ещё не горлышко: нужно, чтобы не было альтернативы.</a:t>
             </a:r>
           </a:p>
         </p:txBody>
@@ -21833,7 +22214,7 @@
                 </a:solidFill>
                 <a:latin typeface="Onest"/>
               </a:rPr>
-              <a:t>Право на мир и героев: лицензии на франшизы</a:t>
+              <a:t>Право на мир и героев</a:t>
             </a:r>
           </a:p>
         </p:txBody>
@@ -22068,7 +22449,7 @@
                 </a:solidFill>
                 <a:latin typeface="Onest"/>
               </a:rPr>
-              <a:t>Решение о финансировании — greenlight</a:t>
+              <a:t>Проработанность идеи: сеттинг, фишка, механика</a:t>
             </a:r>
           </a:p>
         </p:txBody>
@@ -22280,14 +22661,14 @@
                 </a:solidFill>
                 <a:latin typeface="Onest"/>
               </a:rPr>
-              <a:t>Выбор студий: кто станет стандартом</a:t>
+              <a:t>Производственный стандарт</a:t>
             </a:r>
           </a:p>
         </p:txBody>
       </p:sp>
       <p:pic>
         <p:nvPicPr>
-          <p:cNvPr id="25" name="Picture 24" descr="godotengine.png"/>
+          <p:cNvPr id="25" name="Picture 24" descr="nvidia.png"/>
           <p:cNvPicPr>
             <a:picLocks noChangeAspect="1"/>
           </p:cNvPicPr>
@@ -22311,7 +22692,7 @@
       </p:pic>
       <p:pic>
         <p:nvPicPr>
-          <p:cNvPr id="26" name="Picture 25" descr="unity.png"/>
+          <p:cNvPr id="26" name="Picture 25" descr="godotengine.png"/>
           <p:cNvPicPr>
             <a:picLocks noChangeAspect="1"/>
           </p:cNvPicPr>
@@ -22335,7 +22716,7 @@
       </p:pic>
       <p:pic>
         <p:nvPicPr>
-          <p:cNvPr id="27" name="Picture 26" descr="unrealengine.png"/>
+          <p:cNvPr id="27" name="Picture 26" descr="unity.png"/>
           <p:cNvPicPr>
             <a:picLocks noChangeAspect="1"/>
           </p:cNvPicPr>
@@ -22357,9 +22738,33 @@
           </a:prstGeom>
         </p:spPr>
       </p:pic>
-      <p:sp>
-        <p:nvSpPr>
-          <p:cNvPr id="28" name="Rounded Rectangle 27"/>
+      <p:pic>
+        <p:nvPicPr>
+          <p:cNvPr id="28" name="Picture 27" descr="unrealengine.png"/>
+          <p:cNvPicPr>
+            <a:picLocks noChangeAspect="1"/>
+          </p:cNvPicPr>
+          <p:nvPr/>
+        </p:nvPicPr>
+        <p:blipFill>
+          <a:blip r:embed="rId10"/>
+          <a:stretch>
+            <a:fillRect/>
+          </a:stretch>
+        </p:blipFill>
+        <p:spPr>
+          <a:xfrm>
+            <a:off x="9512503" y="2706624"/>
+            <a:ext cx="365760" cy="365760"/>
+          </a:xfrm>
+          <a:prstGeom prst="rect">
+            <a:avLst/>
+          </a:prstGeom>
+        </p:spPr>
+      </p:pic>
+      <p:sp>
+        <p:nvSpPr>
+          <p:cNvPr id="29" name="Rounded Rectangle 28"/>
           <p:cNvSpPr/>
           <p:nvPr/>
         </p:nvSpPr>
@@ -22405,7 +22810,7 @@
       </p:sp>
       <p:sp>
         <p:nvSpPr>
-          <p:cNvPr id="29" name="TextBox 28"/>
+          <p:cNvPr id="30" name="TextBox 29"/>
           <p:cNvSpPr txBox="1"/>
           <p:nvPr/>
         </p:nvSpPr>
@@ -22444,7 +22849,7 @@
       </p:sp>
       <p:sp>
         <p:nvSpPr>
-          <p:cNvPr id="30" name="TextBox 29"/>
+          <p:cNvPr id="31" name="TextBox 30"/>
           <p:cNvSpPr txBox="1"/>
           <p:nvPr/>
         </p:nvSpPr>
@@ -22484,7 +22889,7 @@
       </p:sp>
       <p:sp>
         <p:nvSpPr>
-          <p:cNvPr id="31" name="TextBox 30"/>
+          <p:cNvPr id="32" name="TextBox 31"/>
           <p:cNvSpPr txBox="1"/>
           <p:nvPr/>
         </p:nvSpPr>
@@ -22523,31 +22928,7 @@
       </p:sp>
       <p:pic>
         <p:nvPicPr>
-          <p:cNvPr id="32" name="Picture 31" descr="jali.png"/>
-          <p:cNvPicPr>
-            <a:picLocks noChangeAspect="1"/>
-          </p:cNvPicPr>
-          <p:nvPr/>
-        </p:nvPicPr>
-        <p:blipFill>
-          <a:blip r:embed="rId10"/>
-          <a:stretch>
-            <a:fillRect/>
-          </a:stretch>
-        </p:blipFill>
-        <p:spPr>
-          <a:xfrm>
-            <a:off x="10669872" y="3374136"/>
-            <a:ext cx="744582" cy="365760"/>
-          </a:xfrm>
-          <a:prstGeom prst="rect">
-            <a:avLst/>
-          </a:prstGeom>
-        </p:spPr>
-      </p:pic>
-      <p:pic>
-        <p:nvPicPr>
-          <p:cNvPr id="33" name="Picture 32" descr="keywords.png"/>
+          <p:cNvPr id="33" name="Picture 32" descr="jali.png"/>
           <p:cNvPicPr>
             <a:picLocks noChangeAspect="1"/>
           </p:cNvPicPr>
@@ -22561,8 +22942,8 @@
         </p:blipFill>
         <p:spPr>
           <a:xfrm>
-            <a:off x="9654888" y="3445850"/>
-            <a:ext cx="868680" cy="222331"/>
+            <a:off x="10669872" y="3374136"/>
+            <a:ext cx="744582" cy="365760"/>
           </a:xfrm>
           <a:prstGeom prst="rect">
             <a:avLst/>
@@ -22571,7 +22952,7 @@
       </p:pic>
       <p:pic>
         <p:nvPicPr>
-          <p:cNvPr id="34" name="Picture 33" descr="room8.png"/>
+          <p:cNvPr id="34" name="Picture 33" descr="keywords.png"/>
           <p:cNvPicPr>
             <a:picLocks noChangeAspect="1"/>
           </p:cNvPicPr>
@@ -22585,8 +22966,8 @@
         </p:blipFill>
         <p:spPr>
           <a:xfrm>
-            <a:off x="8667336" y="3374136"/>
-            <a:ext cx="841248" cy="365760"/>
+            <a:off x="9654888" y="3445850"/>
+            <a:ext cx="868680" cy="222331"/>
           </a:xfrm>
           <a:prstGeom prst="rect">
             <a:avLst/>
@@ -22595,7 +22976,7 @@
       </p:pic>
       <p:pic>
         <p:nvPicPr>
-          <p:cNvPr id="35" name="Picture 34" descr="virtuos.png"/>
+          <p:cNvPr id="35" name="Picture 34" descr="room8.png"/>
           <p:cNvPicPr>
             <a:picLocks noChangeAspect="1"/>
           </p:cNvPicPr>
@@ -22609,6 +22990,30 @@
         </p:blipFill>
         <p:spPr>
           <a:xfrm>
+            <a:off x="8667336" y="3374136"/>
+            <a:ext cx="841248" cy="365760"/>
+          </a:xfrm>
+          <a:prstGeom prst="rect">
+            <a:avLst/>
+          </a:prstGeom>
+        </p:spPr>
+      </p:pic>
+      <p:pic>
+        <p:nvPicPr>
+          <p:cNvPr id="36" name="Picture 35" descr="virtuos.png"/>
+          <p:cNvPicPr>
+            <a:picLocks noChangeAspect="1"/>
+          </p:cNvPicPr>
+          <p:nvPr/>
+        </p:nvPicPr>
+        <p:blipFill>
+          <a:blip r:embed="rId14"/>
+          <a:stretch>
+            <a:fillRect/>
+          </a:stretch>
+        </p:blipFill>
+        <p:spPr>
+          <a:xfrm>
             <a:off x="7652352" y="3438942"/>
             <a:ext cx="868680" cy="236146"/>
           </a:xfrm>
@@ -22619,7 +23024,7 @@
       </p:pic>
       <p:sp>
         <p:nvSpPr>
-          <p:cNvPr id="36" name="Rounded Rectangle 35"/>
+          <p:cNvPr id="37" name="Rounded Rectangle 36"/>
           <p:cNvSpPr/>
           <p:nvPr/>
         </p:nvSpPr>
@@ -22665,7 +23070,7 @@
       </p:sp>
       <p:sp>
         <p:nvSpPr>
-          <p:cNvPr id="37" name="TextBox 36"/>
+          <p:cNvPr id="38" name="TextBox 37"/>
           <p:cNvSpPr txBox="1"/>
           <p:nvPr/>
         </p:nvSpPr>
@@ -22704,7 +23109,7 @@
       </p:sp>
       <p:sp>
         <p:nvSpPr>
-          <p:cNvPr id="38" name="TextBox 37"/>
+          <p:cNvPr id="39" name="TextBox 38"/>
           <p:cNvSpPr txBox="1"/>
           <p:nvPr/>
         </p:nvSpPr>
@@ -22743,7 +23148,7 @@
       </p:sp>
       <p:sp>
         <p:nvSpPr>
-          <p:cNvPr id="39" name="TextBox 38"/>
+          <p:cNvPr id="40" name="TextBox 39"/>
           <p:cNvSpPr txBox="1"/>
           <p:nvPr/>
         </p:nvSpPr>
@@ -22775,14 +23180,14 @@
                 </a:solidFill>
                 <a:latin typeface="Onest"/>
               </a:rPr>
-              <a:t>Выбор игроком игры — какую играть</a:t>
+              <a:t>Почерк студии и уровень проработки</a:t>
             </a:r>
           </a:p>
         </p:txBody>
       </p:sp>
       <p:pic>
         <p:nvPicPr>
-          <p:cNvPr id="40" name="Picture 39" descr="valve.png"/>
+          <p:cNvPr id="41" name="Picture 40" descr="valve.png"/>
           <p:cNvPicPr>
             <a:picLocks noChangeAspect="1"/>
           </p:cNvPicPr>
@@ -22806,14 +23211,14 @@
       </p:pic>
       <p:pic>
         <p:nvPicPr>
-          <p:cNvPr id="41" name="Picture 40" descr="riotgames.png"/>
+          <p:cNvPr id="42" name="Picture 41" descr="riotgames.png"/>
           <p:cNvPicPr>
             <a:picLocks noChangeAspect="1"/>
           </p:cNvPicPr>
           <p:nvPr/>
         </p:nvPicPr>
         <p:blipFill>
-          <a:blip r:embed="rId14"/>
+          <a:blip r:embed="rId15"/>
           <a:stretch>
             <a:fillRect/>
           </a:stretch>
@@ -22830,7 +23235,7 @@
       </p:pic>
       <p:pic>
         <p:nvPicPr>
-          <p:cNvPr id="42" name="Picture 41" descr="rockstargames.png"/>
+          <p:cNvPr id="43" name="Picture 42" descr="rockstargames.png"/>
           <p:cNvPicPr>
             <a:picLocks noChangeAspect="1"/>
           </p:cNvPicPr>
@@ -22854,7 +23259,7 @@
       </p:pic>
       <p:pic>
         <p:nvPicPr>
-          <p:cNvPr id="43" name="Picture 42" descr="cdprojekt.png"/>
+          <p:cNvPr id="44" name="Picture 43" descr="cdprojekt.png"/>
           <p:cNvPicPr>
             <a:picLocks noChangeAspect="1"/>
           </p:cNvPicPr>
@@ -22878,7 +23283,7 @@
       </p:pic>
       <p:sp>
         <p:nvSpPr>
-          <p:cNvPr id="44" name="Rounded Rectangle 43"/>
+          <p:cNvPr id="45" name="Rounded Rectangle 44"/>
           <p:cNvSpPr/>
           <p:nvPr/>
         </p:nvSpPr>
@@ -22924,7 +23329,7 @@
       </p:sp>
       <p:sp>
         <p:nvSpPr>
-          <p:cNvPr id="45" name="TextBox 44"/>
+          <p:cNvPr id="46" name="TextBox 45"/>
           <p:cNvSpPr txBox="1"/>
           <p:nvPr/>
         </p:nvSpPr>
@@ -22963,7 +23368,7 @@
       </p:sp>
       <p:sp>
         <p:nvSpPr>
-          <p:cNvPr id="46" name="TextBox 45"/>
+          <p:cNvPr id="47" name="TextBox 46"/>
           <p:cNvSpPr txBox="1"/>
           <p:nvPr/>
         </p:nvSpPr>
@@ -22995,15 +23400,14 @@
                 </a:solidFill>
                 <a:latin typeface="Onest"/>
               </a:rPr>
-              <a:t>Издание
-и маркетинг</a:t>
-            </a:r>
-          </a:p>
-        </p:txBody>
-      </p:sp>
-      <p:sp>
-        <p:nvSpPr>
-          <p:cNvPr id="47" name="TextBox 46"/>
+              <a:t>Издание</a:t>
+            </a:r>
+          </a:p>
+        </p:txBody>
+      </p:sp>
+      <p:sp>
+        <p:nvSpPr>
+          <p:cNvPr id="48" name="TextBox 47"/>
           <p:cNvSpPr txBox="1"/>
           <p:nvPr/>
         </p:nvSpPr>
@@ -23035,38 +23439,14 @@
                 </a:solidFill>
                 <a:latin typeface="Onest"/>
               </a:rPr>
-              <a:t>Права на издание и релиз</a:t>
+              <a:t>Права на релиз и продвижение</a:t>
             </a:r>
           </a:p>
         </p:txBody>
       </p:sp>
       <p:pic>
         <p:nvPicPr>
-          <p:cNvPr id="48" name="Picture 47" descr="squareenix.png"/>
-          <p:cNvPicPr>
-            <a:picLocks noChangeAspect="1"/>
-          </p:cNvPicPr>
-          <p:nvPr/>
-        </p:nvPicPr>
-        <p:blipFill>
-          <a:blip r:embed="rId15"/>
-          <a:stretch>
-            <a:fillRect/>
-          </a:stretch>
-        </p:blipFill>
-        <p:spPr>
-          <a:xfrm>
-            <a:off x="11048695" y="4709159"/>
-            <a:ext cx="365760" cy="365760"/>
-          </a:xfrm>
-          <a:prstGeom prst="rect">
-            <a:avLst/>
-          </a:prstGeom>
-        </p:spPr>
-      </p:pic>
-      <p:pic>
-        <p:nvPicPr>
-          <p:cNvPr id="49" name="Picture 48" descr="ea.png"/>
+          <p:cNvPr id="49" name="Picture 48" descr="squareenix.png"/>
           <p:cNvPicPr>
             <a:picLocks noChangeAspect="1"/>
           </p:cNvPicPr>
@@ -23080,7 +23460,7 @@
         </p:blipFill>
         <p:spPr>
           <a:xfrm>
-            <a:off x="10536631" y="4709159"/>
+            <a:off x="11048695" y="4709159"/>
             <a:ext cx="365760" cy="365760"/>
           </a:xfrm>
           <a:prstGeom prst="rect">
@@ -23090,7 +23470,7 @@
       </p:pic>
       <p:pic>
         <p:nvPicPr>
-          <p:cNvPr id="50" name="Picture 49" descr="ubisoft.png"/>
+          <p:cNvPr id="50" name="Picture 49" descr="ea.png"/>
           <p:cNvPicPr>
             <a:picLocks noChangeAspect="1"/>
           </p:cNvPicPr>
@@ -23104,7 +23484,7 @@
         </p:blipFill>
         <p:spPr>
           <a:xfrm>
-            <a:off x="10024567" y="4709159"/>
+            <a:off x="10536631" y="4709159"/>
             <a:ext cx="365760" cy="365760"/>
           </a:xfrm>
           <a:prstGeom prst="rect">
@@ -23114,7 +23494,7 @@
       </p:pic>
       <p:pic>
         <p:nvPicPr>
-          <p:cNvPr id="51" name="Picture 50" descr="sony.png"/>
+          <p:cNvPr id="51" name="Picture 50" descr="ubisoft.png"/>
           <p:cNvPicPr>
             <a:picLocks noChangeAspect="1"/>
           </p:cNvPicPr>
@@ -23128,6 +23508,30 @@
         </p:blipFill>
         <p:spPr>
           <a:xfrm>
+            <a:off x="10024567" y="4709159"/>
+            <a:ext cx="365760" cy="365760"/>
+          </a:xfrm>
+          <a:prstGeom prst="rect">
+            <a:avLst/>
+          </a:prstGeom>
+        </p:spPr>
+      </p:pic>
+      <p:pic>
+        <p:nvPicPr>
+          <p:cNvPr id="52" name="Picture 51" descr="sony.png"/>
+          <p:cNvPicPr>
+            <a:picLocks noChangeAspect="1"/>
+          </p:cNvPicPr>
+          <p:nvPr/>
+        </p:nvPicPr>
+        <p:blipFill>
+          <a:blip r:embed="rId19"/>
+          <a:stretch>
+            <a:fillRect/>
+          </a:stretch>
+        </p:blipFill>
+        <p:spPr>
+          <a:xfrm>
             <a:off x="9512503" y="4709159"/>
             <a:ext cx="365760" cy="365760"/>
           </a:xfrm>
@@ -23138,7 +23542,7 @@
       </p:pic>
       <p:sp>
         <p:nvSpPr>
-          <p:cNvPr id="52" name="Rounded Rectangle 51"/>
+          <p:cNvPr id="53" name="Rounded Rectangle 52"/>
           <p:cNvSpPr/>
           <p:nvPr/>
         </p:nvSpPr>
@@ -23184,7 +23588,7 @@
       </p:sp>
       <p:sp>
         <p:nvSpPr>
-          <p:cNvPr id="53" name="TextBox 52"/>
+          <p:cNvPr id="54" name="TextBox 53"/>
           <p:cNvSpPr txBox="1"/>
           <p:nvPr/>
         </p:nvSpPr>
@@ -23223,7 +23627,7 @@
       </p:sp>
       <p:sp>
         <p:nvSpPr>
-          <p:cNvPr id="54" name="TextBox 53"/>
+          <p:cNvPr id="55" name="TextBox 54"/>
           <p:cNvSpPr txBox="1"/>
           <p:nvPr/>
         </p:nvSpPr>
@@ -23255,15 +23659,15 @@
                 </a:solidFill>
                 <a:latin typeface="Onest"/>
               </a:rPr>
-              <a:t>Платформы
-и железо</a:t>
-            </a:r>
-          </a:p>
-        </p:txBody>
-      </p:sp>
-      <p:sp>
-        <p:nvSpPr>
-          <p:cNvPr id="55" name="TextBox 54"/>
+              <a:t>Игровые
+платформы</a:t>
+            </a:r>
+          </a:p>
+        </p:txBody>
+      </p:sp>
+      <p:sp>
+        <p:nvSpPr>
+          <p:cNvPr id="56" name="TextBox 55"/>
           <p:cNvSpPr txBox="1"/>
           <p:nvPr/>
         </p:nvSpPr>
@@ -23302,31 +23706,7 @@
       </p:sp>
       <p:pic>
         <p:nvPicPr>
-          <p:cNvPr id="56" name="Picture 55" descr="android.png"/>
-          <p:cNvPicPr>
-            <a:picLocks noChangeAspect="1"/>
-          </p:cNvPicPr>
-          <p:nvPr/>
-        </p:nvPicPr>
-        <p:blipFill>
-          <a:blip r:embed="rId19"/>
-          <a:stretch>
-            <a:fillRect/>
-          </a:stretch>
-        </p:blipFill>
-        <p:spPr>
-          <a:xfrm>
-            <a:off x="11048695" y="5376672"/>
-            <a:ext cx="365760" cy="365760"/>
-          </a:xfrm>
-          <a:prstGeom prst="rect">
-            <a:avLst/>
-          </a:prstGeom>
-        </p:spPr>
-      </p:pic>
-      <p:pic>
-        <p:nvPicPr>
-          <p:cNvPr id="57" name="Picture 56" descr="apple.png"/>
+          <p:cNvPr id="57" name="Picture 56" descr="android.png"/>
           <p:cNvPicPr>
             <a:picLocks noChangeAspect="1"/>
           </p:cNvPicPr>
@@ -23340,7 +23720,7 @@
         </p:blipFill>
         <p:spPr>
           <a:xfrm>
-            <a:off x="10536631" y="5376672"/>
+            <a:off x="11048695" y="5376672"/>
             <a:ext cx="365760" cy="365760"/>
           </a:xfrm>
           <a:prstGeom prst="rect">
@@ -23350,7 +23730,7 @@
       </p:pic>
       <p:pic>
         <p:nvPicPr>
-          <p:cNvPr id="58" name="Picture 57" descr="nintendoswitch.png"/>
+          <p:cNvPr id="58" name="Picture 57" descr="apple.png"/>
           <p:cNvPicPr>
             <a:picLocks noChangeAspect="1"/>
           </p:cNvPicPr>
@@ -23364,7 +23744,7 @@
         </p:blipFill>
         <p:spPr>
           <a:xfrm>
-            <a:off x="10024567" y="5376672"/>
+            <a:off x="10536631" y="5376672"/>
             <a:ext cx="365760" cy="365760"/>
           </a:xfrm>
           <a:prstGeom prst="rect">
@@ -23374,7 +23754,7 @@
       </p:pic>
       <p:pic>
         <p:nvPicPr>
-          <p:cNvPr id="59" name="Picture 58" descr="xbox.png"/>
+          <p:cNvPr id="59" name="Picture 58" descr="nintendoswitch.png"/>
           <p:cNvPicPr>
             <a:picLocks noChangeAspect="1"/>
           </p:cNvPicPr>
@@ -23388,7 +23768,7 @@
         </p:blipFill>
         <p:spPr>
           <a:xfrm>
-            <a:off x="9512503" y="5376672"/>
+            <a:off x="10024567" y="5376672"/>
             <a:ext cx="365760" cy="365760"/>
           </a:xfrm>
           <a:prstGeom prst="rect">
@@ -23398,7 +23778,7 @@
       </p:pic>
       <p:pic>
         <p:nvPicPr>
-          <p:cNvPr id="60" name="Picture 59" descr="playstation.png"/>
+          <p:cNvPr id="60" name="Picture 59" descr="xbox.png"/>
           <p:cNvPicPr>
             <a:picLocks noChangeAspect="1"/>
           </p:cNvPicPr>
@@ -23412,6 +23792,30 @@
         </p:blipFill>
         <p:spPr>
           <a:xfrm>
+            <a:off x="9512503" y="5376672"/>
+            <a:ext cx="365760" cy="365760"/>
+          </a:xfrm>
+          <a:prstGeom prst="rect">
+            <a:avLst/>
+          </a:prstGeom>
+        </p:spPr>
+      </p:pic>
+      <p:pic>
+        <p:nvPicPr>
+          <p:cNvPr id="61" name="Picture 60" descr="playstation.png"/>
+          <p:cNvPicPr>
+            <a:picLocks noChangeAspect="1"/>
+          </p:cNvPicPr>
+          <p:nvPr/>
+        </p:nvPicPr>
+        <p:blipFill>
+          <a:blip r:embed="rId24"/>
+          <a:stretch>
+            <a:fillRect/>
+          </a:stretch>
+        </p:blipFill>
+        <p:spPr>
+          <a:xfrm>
             <a:off x="9000439" y="5376672"/>
             <a:ext cx="365760" cy="365760"/>
           </a:xfrm>
@@ -23422,7 +23826,7 @@
       </p:pic>
       <p:sp>
         <p:nvSpPr>
-          <p:cNvPr id="61" name="Rounded Rectangle 60"/>
+          <p:cNvPr id="62" name="Rounded Rectangle 61"/>
           <p:cNvSpPr/>
           <p:nvPr/>
         </p:nvSpPr>
@@ -23468,7 +23872,7 @@
       </p:sp>
       <p:sp>
         <p:nvSpPr>
-          <p:cNvPr id="62" name="TextBox 61"/>
+          <p:cNvPr id="63" name="TextBox 62"/>
           <p:cNvSpPr txBox="1"/>
           <p:nvPr/>
         </p:nvSpPr>
@@ -23507,7 +23911,7 @@
       </p:sp>
       <p:sp>
         <p:nvSpPr>
-          <p:cNvPr id="63" name="TextBox 62"/>
+          <p:cNvPr id="64" name="TextBox 63"/>
           <p:cNvSpPr txBox="1"/>
           <p:nvPr/>
         </p:nvSpPr>
@@ -23547,7 +23951,7 @@
       </p:sp>
       <p:sp>
         <p:nvSpPr>
-          <p:cNvPr id="64" name="TextBox 63"/>
+          <p:cNvPr id="65" name="TextBox 64"/>
           <p:cNvSpPr txBox="1"/>
           <p:nvPr/>
         </p:nvSpPr>
@@ -23579,38 +23983,14 @@
                 </a:solidFill>
                 <a:latin typeface="Onest"/>
               </a:rPr>
-              <a:t>Аккаунт и библиотека игрока; каталог разработчиков</a:t>
+              <a:t>Время игрока и его LTV</a:t>
             </a:r>
           </a:p>
         </p:txBody>
       </p:sp>
       <p:pic>
         <p:nvPicPr>
-          <p:cNvPr id="65" name="Picture 64" descr="googleplay_paper.png"/>
-          <p:cNvPicPr>
-            <a:picLocks noChangeAspect="1"/>
-          </p:cNvPicPr>
-          <p:nvPr/>
-        </p:nvPicPr>
-        <p:blipFill>
-          <a:blip r:embed="rId24"/>
-          <a:stretch>
-            <a:fillRect/>
-          </a:stretch>
-        </p:blipFill>
-        <p:spPr>
-          <a:xfrm>
-            <a:off x="11048695" y="6044184"/>
-            <a:ext cx="365760" cy="365760"/>
-          </a:xfrm>
-          <a:prstGeom prst="rect">
-            <a:avLst/>
-          </a:prstGeom>
-        </p:spPr>
-      </p:pic>
-      <p:pic>
-        <p:nvPicPr>
-          <p:cNvPr id="66" name="Picture 65" descr="appstore_paper.png"/>
+          <p:cNvPr id="66" name="Picture 65" descr="googleplay_paper.png"/>
           <p:cNvPicPr>
             <a:picLocks noChangeAspect="1"/>
           </p:cNvPicPr>
@@ -23624,7 +24004,7 @@
         </p:blipFill>
         <p:spPr>
           <a:xfrm>
-            <a:off x="10536631" y="6044184"/>
+            <a:off x="11048695" y="6044184"/>
             <a:ext cx="365760" cy="365760"/>
           </a:xfrm>
           <a:prstGeom prst="rect">
@@ -23634,7 +24014,7 @@
       </p:pic>
       <p:pic>
         <p:nvPicPr>
-          <p:cNvPr id="67" name="Picture 66" descr="nintendoswitch_paper.png"/>
+          <p:cNvPr id="67" name="Picture 66" descr="appstore_paper.png"/>
           <p:cNvPicPr>
             <a:picLocks noChangeAspect="1"/>
           </p:cNvPicPr>
@@ -23648,7 +24028,7 @@
         </p:blipFill>
         <p:spPr>
           <a:xfrm>
-            <a:off x="10024567" y="6044184"/>
+            <a:off x="10536631" y="6044184"/>
             <a:ext cx="365760" cy="365760"/>
           </a:xfrm>
           <a:prstGeom prst="rect">
@@ -23658,7 +24038,7 @@
       </p:pic>
       <p:pic>
         <p:nvPicPr>
-          <p:cNvPr id="68" name="Picture 67" descr="xbox_paper.png"/>
+          <p:cNvPr id="68" name="Picture 67" descr="nintendoswitch_paper.png"/>
           <p:cNvPicPr>
             <a:picLocks noChangeAspect="1"/>
           </p:cNvPicPr>
@@ -23672,7 +24052,7 @@
         </p:blipFill>
         <p:spPr>
           <a:xfrm>
-            <a:off x="9512503" y="6044184"/>
+            <a:off x="10024567" y="6044184"/>
             <a:ext cx="365760" cy="365760"/>
           </a:xfrm>
           <a:prstGeom prst="rect">
@@ -23682,7 +24062,7 @@
       </p:pic>
       <p:pic>
         <p:nvPicPr>
-          <p:cNvPr id="69" name="Picture 68" descr="playstation_paper.png"/>
+          <p:cNvPr id="69" name="Picture 68" descr="xbox_paper.png"/>
           <p:cNvPicPr>
             <a:picLocks noChangeAspect="1"/>
           </p:cNvPicPr>
@@ -23696,7 +24076,7 @@
         </p:blipFill>
         <p:spPr>
           <a:xfrm>
-            <a:off x="9000439" y="6044184"/>
+            <a:off x="9512503" y="6044184"/>
             <a:ext cx="365760" cy="365760"/>
           </a:xfrm>
           <a:prstGeom prst="rect">
@@ -23706,7 +24086,7 @@
       </p:pic>
       <p:pic>
         <p:nvPicPr>
-          <p:cNvPr id="70" name="Picture 69" descr="steam_paper.png"/>
+          <p:cNvPr id="70" name="Picture 69" descr="playstation_paper.png"/>
           <p:cNvPicPr>
             <a:picLocks noChangeAspect="1"/>
           </p:cNvPicPr>
@@ -23714,6 +24094,30 @@
         </p:nvPicPr>
         <p:blipFill>
           <a:blip r:embed="rId29"/>
+          <a:stretch>
+            <a:fillRect/>
+          </a:stretch>
+        </p:blipFill>
+        <p:spPr>
+          <a:xfrm>
+            <a:off x="9000439" y="6044184"/>
+            <a:ext cx="365760" cy="365760"/>
+          </a:xfrm>
+          <a:prstGeom prst="rect">
+            <a:avLst/>
+          </a:prstGeom>
+        </p:spPr>
+      </p:pic>
+      <p:pic>
+        <p:nvPicPr>
+          <p:cNvPr id="71" name="Picture 70" descr="steam_paper.png"/>
+          <p:cNvPicPr>
+            <a:picLocks noChangeAspect="1"/>
+          </p:cNvPicPr>
+          <p:nvPr/>
+        </p:nvPicPr>
+        <p:blipFill>
+          <a:blip r:embed="rId30"/>
           <a:stretch>
             <a:fillRect/>
           </a:stretch>
@@ -24306,53 +24710,9 @@
           </a:p>
         </p:txBody>
       </p:sp>
-      <p:sp>
-        <p:nvSpPr>
-          <p:cNvPr id="16" name="Oval 15"/>
-          <p:cNvSpPr/>
-          <p:nvPr/>
-        </p:nvSpPr>
-        <p:spPr>
-          <a:xfrm>
-            <a:off x="8307628" y="2404872"/>
-            <a:ext cx="1051560" cy="1051560"/>
-          </a:xfrm>
-          <a:prstGeom prst="ellipse">
-            <a:avLst/>
-          </a:prstGeom>
-          <a:solidFill>
-            <a:srgbClr val="E7E1D5"/>
-          </a:solidFill>
-          <a:ln>
-            <a:noFill/>
-          </a:ln>
-          <a:effectLst/>
-        </p:spPr>
-        <p:style>
-          <a:lnRef idx="1">
-            <a:schemeClr val="accent1"/>
-          </a:lnRef>
-          <a:fillRef idx="3">
-            <a:schemeClr val="accent1"/>
-          </a:fillRef>
-          <a:effectRef idx="2">
-            <a:schemeClr val="accent1"/>
-          </a:effectRef>
-          <a:fontRef idx="minor">
-            <a:schemeClr val="lt1"/>
-          </a:fontRef>
-        </p:style>
-        <p:txBody>
-          <a:bodyPr rtlCol="0" anchor="ctr"/>
-          <a:lstStyle/>
-          <a:p>
-            <a:pPr algn="ctr"/>
-          </a:p>
-        </p:txBody>
-      </p:sp>
       <p:pic>
         <p:nvPicPr>
-          <p:cNvPr id="17" name="Picture 16" descr="ui_shield_F26A1B.png"/>
+          <p:cNvPr id="16" name="Picture 15" descr="cdprojekt.png"/>
           <p:cNvPicPr>
             <a:picLocks noChangeAspect="1"/>
           </p:cNvPicPr>
@@ -24366,8 +24726,8 @@
         </p:blipFill>
         <p:spPr>
           <a:xfrm>
-            <a:off x="8545372" y="2642615"/>
-            <a:ext cx="576071" cy="576071"/>
+            <a:off x="8307628" y="2404872"/>
+            <a:ext cx="566928" cy="566928"/>
           </a:xfrm>
           <a:prstGeom prst="rect">
             <a:avLst/>
@@ -24376,14 +24736,54 @@
       </p:pic>
       <p:sp>
         <p:nvSpPr>
+          <p:cNvPr id="17" name="TextBox 16"/>
+          <p:cNvSpPr txBox="1"/>
+          <p:nvPr/>
+        </p:nvSpPr>
+        <p:spPr>
+          <a:xfrm>
+            <a:off x="8307628" y="3246119"/>
+            <a:ext cx="3033674" cy="676656"/>
+          </a:xfrm>
+          <a:prstGeom prst="rect">
+            <a:avLst/>
+          </a:prstGeom>
+          <a:noFill/>
+        </p:spPr>
+        <p:txBody>
+          <a:bodyPr wrap="square" lIns="0" rIns="0" tIns="0" bIns="0" anchor="t">
+            <a:spAutoFit/>
+          </a:bodyPr>
+          <a:lstStyle/>
+          <a:p>
+            <a:pPr algn="l">
+              <a:lnSpc>
+                <a:spcPct val="108000"/>
+              </a:lnSpc>
+            </a:pPr>
+            <a:r>
+              <a:rPr sz="1700" b="1">
+                <a:solidFill>
+                  <a:srgbClr val="16140F"/>
+                </a:solidFill>
+                <a:latin typeface="Onest"/>
+              </a:rPr>
+              <a:t>Cyberpunk 2077:
+права у Пондсмита</a:t>
+            </a:r>
+          </a:p>
+        </p:txBody>
+      </p:sp>
+      <p:sp>
+        <p:nvSpPr>
           <p:cNvPr id="18" name="TextBox 17"/>
           <p:cNvSpPr txBox="1"/>
           <p:nvPr/>
         </p:nvSpPr>
         <p:spPr>
           <a:xfrm>
-            <a:off x="8307628" y="3621024"/>
-            <a:ext cx="3033674" cy="365759"/>
+            <a:off x="8307628" y="3995927"/>
+            <a:ext cx="3033674" cy="1645920"/>
           </a:xfrm>
           <a:prstGeom prst="rect">
             <a:avLst/>
@@ -24398,17 +24798,17 @@
           <a:p>
             <a:pPr algn="l">
               <a:lnSpc>
-                <a:spcPct val="108000"/>
-              </a:lnSpc>
-            </a:pPr>
-            <a:r>
-              <a:rPr sz="1700" b="1">
-                <a:solidFill>
-                  <a:srgbClr val="16140F"/>
-                </a:solidFill>
-                <a:latin typeface="Onest"/>
-              </a:rPr>
-              <a:t>За что конкурируют</a:t>
+                <a:spcPct val="130000"/>
+              </a:lnSpc>
+            </a:pPr>
+            <a:r>
+              <a:rPr sz="1300" b="0">
+                <a:solidFill>
+                  <a:srgbClr val="6B6558"/>
+                </a:solidFill>
+                <a:latin typeface="Onest"/>
+              </a:rPr>
+              <a:t>CD Projekt не придумала Найт-Сити — взяла права на настольную Cyberpunk 2020 у Майка Пондсмита.</a:t>
             </a:r>
           </a:p>
         </p:txBody>
@@ -24416,45 +24816,6 @@
       <p:sp>
         <p:nvSpPr>
           <p:cNvPr id="19" name="TextBox 18"/>
-          <p:cNvSpPr txBox="1"/>
-          <p:nvPr/>
-        </p:nvSpPr>
-        <p:spPr>
-          <a:xfrm>
-            <a:off x="8307628" y="4059936"/>
-            <a:ext cx="3033674" cy="1645920"/>
-          </a:xfrm>
-          <a:prstGeom prst="rect">
-            <a:avLst/>
-          </a:prstGeom>
-          <a:noFill/>
-        </p:spPr>
-        <p:txBody>
-          <a:bodyPr wrap="square" lIns="0" rIns="0" tIns="0" bIns="0" anchor="t">
-            <a:spAutoFit/>
-          </a:bodyPr>
-          <a:lstStyle/>
-          <a:p>
-            <a:pPr algn="l">
-              <a:lnSpc>
-                <a:spcPct val="130000"/>
-              </a:lnSpc>
-            </a:pPr>
-            <a:r>
-              <a:rPr sz="1300" b="0">
-                <a:solidFill>
-                  <a:srgbClr val="6B6558"/>
-                </a:solidFill>
-                <a:latin typeface="Onest"/>
-              </a:rPr>
-              <a:t>За лицензии на франшизы — Marvel, Star Wars, Warhammer. Кто получил права, тот и делает игру по миру.</a:t>
-            </a:r>
-          </a:p>
-        </p:txBody>
-      </p:sp>
-      <p:sp>
-        <p:nvSpPr>
-          <p:cNvPr id="20" name="TextBox 19"/>
           <p:cNvSpPr txBox="1"/>
           <p:nvPr/>
         </p:nvSpPr>
@@ -24685,7 +25046,7 @@
                 <a:latin typeface="Onest"/>
               </a:rPr>
               <a:t>Концепт:
-решение о финансировании (greenlight)</a:t>
+проработанная идея, а не ТЗ</a:t>
             </a:r>
           </a:p>
         </p:txBody>
@@ -24877,7 +25238,7 @@
                 </a:solidFill>
                 <a:latin typeface="Onest"/>
               </a:rPr>
-              <a:t>Документ, по которому считают бюджет, сроки и риск. «Хотим RPG про киберпанк» — это ещё не он.</a:t>
+              <a:t>Не «хотим RPG про киберпанк» и не ТЗ. Это проработанный замысел: сеттинг, в чём фишка, какая ключевая механика, чем игра отличается от соседей по жанру.</a:t>
             </a:r>
           </a:p>
         </p:txBody>
@@ -25069,7 +25430,7 @@
                 </a:solidFill>
                 <a:latin typeface="Onest"/>
               </a:rPr>
-              <a:t>За решение дать денег. Внутри Rockstar концепты конкурируют за greenlight между собой; инди — за издателя или платформенный грант снаружи.</a:t>
+              <a:t>За то, чей замысел окажется сильнее проработан. Один и тот же жанр — но выигрывает тот, у кого мир, фишка и механика собраны в целое.</a:t>
             </a:r>
           </a:p>
         </p:txBody>
@@ -25222,8 +25583,8 @@
                 </a:solidFill>
                 <a:latin typeface="Onest"/>
               </a:rPr>
-              <a:t>Риск разный —
-объект один</a:t>
+              <a:t>Концепт живёт
+до производства</a:t>
             </a:r>
           </a:p>
         </p:txBody>
@@ -25262,7 +25623,7 @@
                 </a:solidFill>
                 <a:latin typeface="Onest"/>
               </a:rPr>
-              <a:t>Rockstar ставит миллиарды и 13–15 лет, инди — год и тысячи долларов. Не «низкий» и «высокий» риск, а разный масштаб одной ставки на greenlight.</a:t>
+              <a:t>Он определяет бюджет, сроки и состав команды. Слабый концепт не спасут ни движок, ни подрядчики.</a:t>
             </a:r>
           </a:p>
         </p:txBody>
@@ -25310,7 +25671,7 @@
                 </a:solidFill>
                 <a:latin typeface="Onest"/>
               </a:rPr>
-              <a:t>концепт Пондсмита прошёл greenlight в CD Projekt после успеха «Ведьмака 3» — на ресурсах и репутации студии.</a:t>
+              <a:t>концепт вырос из настольной Cyberpunk 2020: готовый сеттинг, лор и правила мира достались CD Projekt вместе с правами.</a:t>
             </a:r>
           </a:p>
         </p:txBody>
@@ -25500,7 +25861,7 @@
                 <a:latin typeface="Onest"/>
               </a:rPr>
               <a:t>Движки и инструменты:
-выбор студий</a:t>
+производственный стандарт</a:t>
             </a:r>
           </a:p>
         </p:txBody>
@@ -25657,7 +26018,7 @@
                 </a:solidFill>
                 <a:latin typeface="Onest"/>
               </a:rPr>
-              <a:t>Два движка — у 72% студий</a:t>
+              <a:t>Движки: два у 72% студий</a:t>
             </a:r>
           </a:p>
         </p:txBody>
@@ -25696,7 +26057,7 @@
                 </a:solidFill>
                 <a:latin typeface="Onest"/>
               </a:rPr>
-              <a:t>Unreal — 42%, Unity — 30% по опросу GDC 2026. Godot — 8–10% релизов в Steam. Кого выбирают студии, тот становится стандартом.</a:t>
+              <a:t>Unreal — 42%, Unity — 30% по опросу GDC 2026. Godot — 8–10% релизов в Steam. Кого выбирают студии, тот и становится стандартом.</a:t>
             </a:r>
           </a:p>
         </p:txBody>
@@ -25747,53 +26108,9 @@
           </a:p>
         </p:txBody>
       </p:sp>
-      <p:sp>
-        <p:nvSpPr>
-          <p:cNvPr id="13" name="Oval 12"/>
-          <p:cNvSpPr/>
-          <p:nvPr/>
-        </p:nvSpPr>
-        <p:spPr>
-          <a:xfrm>
-            <a:off x="4579010" y="2404872"/>
-            <a:ext cx="1051560" cy="1051560"/>
-          </a:xfrm>
-          <a:prstGeom prst="ellipse">
-            <a:avLst/>
-          </a:prstGeom>
-          <a:solidFill>
-            <a:srgbClr val="E7E1D5"/>
-          </a:solidFill>
-          <a:ln>
-            <a:noFill/>
-          </a:ln>
-          <a:effectLst/>
-        </p:spPr>
-        <p:style>
-          <a:lnRef idx="1">
-            <a:schemeClr val="accent1"/>
-          </a:lnRef>
-          <a:fillRef idx="3">
-            <a:schemeClr val="accent1"/>
-          </a:fillRef>
-          <a:effectRef idx="2">
-            <a:schemeClr val="accent1"/>
-          </a:effectRef>
-          <a:fontRef idx="minor">
-            <a:schemeClr val="lt1"/>
-          </a:fontRef>
-        </p:style>
-        <p:txBody>
-          <a:bodyPr rtlCol="0" anchor="ctr"/>
-          <a:lstStyle/>
-          <a:p>
-            <a:pPr algn="ctr"/>
-          </a:p>
-        </p:txBody>
-      </p:sp>
       <p:pic>
         <p:nvPicPr>
-          <p:cNvPr id="14" name="Picture 13" descr="ui_layers_F26A1B.png"/>
+          <p:cNvPr id="13" name="Picture 12" descr="nvidia.png"/>
           <p:cNvPicPr>
             <a:picLocks noChangeAspect="1"/>
           </p:cNvPicPr>
@@ -25807,14 +26124,38 @@
         </p:blipFill>
         <p:spPr>
           <a:xfrm>
-            <a:off x="4816754" y="2642615"/>
-            <a:ext cx="576071" cy="576071"/>
+            <a:off x="4579010" y="2404872"/>
+            <a:ext cx="566928" cy="566928"/>
           </a:xfrm>
           <a:prstGeom prst="rect">
             <a:avLst/>
           </a:prstGeom>
         </p:spPr>
       </p:pic>
+      <p:pic>
+        <p:nvPicPr>
+          <p:cNvPr id="14" name="Picture 13" descr="amd.png"/>
+          <p:cNvPicPr>
+            <a:picLocks noChangeAspect="1"/>
+          </p:cNvPicPr>
+          <p:nvPr/>
+        </p:nvPicPr>
+        <p:blipFill>
+          <a:blip r:embed="rId6"/>
+          <a:stretch>
+            <a:fillRect/>
+          </a:stretch>
+        </p:blipFill>
+        <p:spPr>
+          <a:xfrm>
+            <a:off x="5310530" y="2404872"/>
+            <a:ext cx="566928" cy="566928"/>
+          </a:xfrm>
+          <a:prstGeom prst="rect">
+            <a:avLst/>
+          </a:prstGeom>
+        </p:spPr>
+      </p:pic>
       <p:sp>
         <p:nvSpPr>
           <p:cNvPr id="15" name="TextBox 14"/>
@@ -25823,8 +26164,8 @@
         </p:nvSpPr>
         <p:spPr>
           <a:xfrm>
-            <a:off x="4579010" y="3621024"/>
-            <a:ext cx="3033674" cy="365759"/>
+            <a:off x="4579010" y="3246119"/>
+            <a:ext cx="3033674" cy="676656"/>
           </a:xfrm>
           <a:prstGeom prst="rect">
             <a:avLst/>
@@ -25849,7 +26190,7 @@
                 </a:solidFill>
                 <a:latin typeface="Onest"/>
               </a:rPr>
-              <a:t>Стандарт — следствие</a:t>
+              <a:t>Инструменты вокруг движка</a:t>
             </a:r>
           </a:p>
         </p:txBody>
@@ -25862,7 +26203,7 @@
         </p:nvSpPr>
         <p:spPr>
           <a:xfrm>
-            <a:off x="4579010" y="4059936"/>
+            <a:off x="4579010" y="3995927"/>
             <a:ext cx="3033674" cy="1645920"/>
           </a:xfrm>
           <a:prstGeom prst="rect">
@@ -25888,7 +26229,7 @@
                 </a:solidFill>
                 <a:latin typeface="Onest"/>
               </a:rPr>
-              <a:t>Под движок нанимают людей, строят пайплайн, покупают ассеты. Сменить — значит переучить студию. Но можно: Valve ушла с Quake на GoldSrc.</a:t>
+              <a:t>Графические API — DirectX, Vulkan, Metal. Физика — Havok, PhysX. Звук — Wwise, FMOD. Ассеты — Houdini, Substance. Версионирование — Perforce, Git LFS.</a:t>
             </a:r>
           </a:p>
         </p:txBody>
@@ -25948,7 +26289,7 @@
           <p:nvPr/>
         </p:nvPicPr>
         <p:blipFill>
-          <a:blip r:embed="rId6"/>
+          <a:blip r:embed="rId7"/>
           <a:stretch>
             <a:fillRect/>
           </a:stretch>
@@ -25972,7 +26313,7 @@
           <p:nvPr/>
         </p:nvPicPr>
         <p:blipFill>
-          <a:blip r:embed="rId7"/>
+          <a:blip r:embed="rId8"/>
           <a:stretch>
             <a:fillRect/>
           </a:stretch>
@@ -26479,8 +26820,7 @@
                 </a:solidFill>
                 <a:latin typeface="Onest"/>
               </a:rPr>
-              <a:t>Сотни студий
-с узким профилем</a:t>
+              <a:t>Сотни студий с узким профилем</a:t>
             </a:r>
           </a:p>
         </p:txBody>
@@ -26519,7 +26859,7 @@
                 </a:solidFill>
                 <a:latin typeface="Onest"/>
               </a:rPr>
-              <a:t>Virtuos и Keywords — производство, Room 8 — арт, JALI — лицевая анимация. Конкурируют за контракты; оружие — опыт: опыт → качество → цена → срок.</a:t>
+              <a:t>Virtuos и Keywords — производство, Room 8 — арт, JALI — лицевая анимация, Wolf3D — 3D-контент. Каждая конкурирует за свой тип контракта.</a:t>
             </a:r>
           </a:p>
         </p:txBody>
@@ -26647,7 +26987,7 @@
         <p:spPr>
           <a:xfrm>
             <a:off x="4579010" y="3621024"/>
-            <a:ext cx="3033674" cy="365759"/>
+            <a:ext cx="3033674" cy="676656"/>
           </a:xfrm>
           <a:prstGeom prst="rect">
             <a:avLst/>
@@ -26672,7 +27012,7 @@
                 </a:solidFill>
                 <a:latin typeface="Onest"/>
               </a:rPr>
-              <a:t>Отбор формальный</a:t>
+              <a:t>Как получают контракт</a:t>
             </a:r>
           </a:p>
         </p:txBody>
@@ -26685,8 +27025,8 @@
         </p:nvSpPr>
         <p:spPr>
           <a:xfrm>
-            <a:off x="4579010" y="4059936"/>
-            <a:ext cx="3033674" cy="1645920"/>
+            <a:off x="4579010" y="4370832"/>
+            <a:ext cx="3033674" cy="1344167"/>
           </a:xfrm>
           <a:prstGeom prst="rect">
             <a:avLst/>
@@ -26711,7 +27051,7 @@
                 </a:solidFill>
                 <a:latin typeface="Onest"/>
               </a:rPr>
-              <a:t>Титры похожих игр, фильтр по профилю, арт-тест, пилот на реальном контенте — и только потом контракт.</a:t>
+              <a:t>Титры похожих игр, фильтр по профилю, арт-тест, пилот на реальном контенте — и только потом договор. Решает сочетание опыта, срока и цены.</a:t>
             </a:r>
           </a:p>
         </p:txBody>

--- a/takt2-gamedev.pptx
+++ b/takt2-gamedev.pptx
@@ -7335,8 +7335,7 @@
                 </a:solidFill>
                 <a:latin typeface="Onest"/>
               </a:rPr>
-              <a:t>Ситуация 1.5: структура та же,
-власть съезжает к краям</a:t>
+              <a:t>Ситуация 1.5: структура та же, власть съезжает к краям</a:t>
             </a:r>
           </a:p>
         </p:txBody>
@@ -10350,8 +10349,7 @@
                 </a:solidFill>
                 <a:latin typeface="Onest"/>
               </a:rPr>
-              <a:t>Ситуация 2: два этажа
-схлопнулись в один</a:t>
+              <a:t>Ситуация 2: два этажа схлопнулись в один</a:t>
             </a:r>
           </a:p>
         </p:txBody>

--- a/takt2-gamedev.pptx
+++ b/takt2-gamedev.pptx
@@ -17346,7 +17346,7 @@
                 </a:solidFill>
                 <a:latin typeface="Onest"/>
               </a:rPr>
-              <a:t>То, обладание чем даёт преимущество. На каждом этаже свой. Не деньги и не доля рынка — это следствие. Если объект нельзя измерить, мы его не называем.</a:t>
+              <a:t>То, обладание которым даёт преимущество. На каждом этаже свой. Не деньги и не доля рынка — это следствие. Если объект нельзя измерить, мы его не называем.</a:t>
             </a:r>
           </a:p>
         </p:txBody>
@@ -18338,7 +18338,7 @@
                 </a:solidFill>
                 <a:latin typeface="Onest"/>
               </a:rPr>
-              <a:t>Тренды действуют, структура цепочки не меняется: этажи те же, меняется их вес и место власти.</a:t>
+              <a:t>Тренды и регуляторы действуют, структура цепочки не меняется: этажи те же, меняется их вес и место власти.</a:t>
             </a:r>
           </a:p>
         </p:txBody>
